--- a/docs/presentation/healthcare-case-study/federated-healthcare-use-case/dagents-federated-stroke-use-case.pptx
+++ b/docs/presentation/healthcare-case-study/federated-healthcare-use-case/dagents-federated-stroke-use-case.pptx
@@ -28,6 +28,12 @@
     <p:sldId id="273" r:id="rId19"/>
     <p:sldId id="274" r:id="rId20"/>
     <p:sldId id="275" r:id="rId21"/>
+    <p:sldId id="291" r:id="rId42"/>
+    <p:sldId id="292" r:id="rId43"/>
+    <p:sldId id="293" r:id="rId44"/>
+    <p:sldId id="294" r:id="rId45"/>
+    <p:sldId id="295" r:id="rId46"/>
+    <p:sldId id="296" r:id="rId47"/>
     <p:sldId id="276" r:id="rId22"/>
     <p:sldId id="277" r:id="rId23"/>
     <p:sldId id="278" r:id="rId24"/>
@@ -6100,7 +6106,7 @@
                 <a:ea typeface="Aptos"/>
                 <a:cs typeface="Aptos"/>
               </a:rPr>
-              <a:t>Hospital-local execution boundary / 08</a:t>
+              <a:t>Hospital-local execution boundary / 10</a:t>
             </a:r>
           </a:p>
         </p:txBody>
@@ -7114,7 +7120,7 @@
                 <a:ea typeface="Aptos"/>
                 <a:cs typeface="Aptos"/>
               </a:rPr>
-              <a:t>Federated control plane / 09</a:t>
+              <a:t>Federated control plane / 11</a:t>
             </a:r>
           </a:p>
         </p:txBody>
@@ -9194,7 +9200,7 @@
                 <a:ea typeface="Aptos"/>
                 <a:cs typeface="Aptos"/>
               </a:rPr>
-              <a:t>Federation is a design family—not a single product or guarantee / 10</a:t>
+              <a:t>Federation is a design family—not a single product or guarantee / 12</a:t>
             </a:r>
           </a:p>
         </p:txBody>
@@ -10879,7 +10885,7 @@
                 <a:ea typeface="Aptos"/>
                 <a:cs typeface="Aptos"/>
               </a:rPr>
-              <a:t>Integrate NVIDIA FLARE or an equivalent runtime; keep Dagents as the reusable governance and orchestration layer / 12</a:t>
+              <a:t>Integrate NVIDIA FLARE or an equivalent runtime; keep Dagents as the reusable governance and orchestration layer / 14</a:t>
             </a:r>
           </a:p>
         </p:txBody>
@@ -11705,7 +11711,7 @@
                 <a:ea typeface="Aptos"/>
                 <a:cs typeface="Aptos"/>
               </a:rPr>
-              <a:t>Seed → bounded updates → verified candidate → immutable release → tested rollback / 13</a:t>
+              <a:t>Seed → bounded updates → verified candidate → immutable release → tested rollback / 15</a:t>
             </a:r>
           </a:p>
         </p:txBody>
@@ -12857,7 +12863,7 @@
                 <a:ea typeface="Aptos"/>
                 <a:cs typeface="Aptos"/>
               </a:rPr>
-              <a:t>Dagents federation component map / 14</a:t>
+              <a:t>Dagents federation component map / 16</a:t>
             </a:r>
           </a:p>
         </p:txBody>
@@ -16781,7 +16787,7 @@
                 <a:ea typeface="Aptos"/>
                 <a:cs typeface="Aptos"/>
               </a:rPr>
-              <a:t>The use case is distributed learning plus governed operations / 03</a:t>
+              <a:t>The use case is distributed learning plus governed operations / 02</a:t>
             </a:r>
           </a:p>
         </p:txBody>
@@ -17795,7 +17801,7 @@
                 <a:ea typeface="Aptos"/>
                 <a:cs typeface="Aptos"/>
               </a:rPr>
-              <a:t>Federated safety gates / 16</a:t>
+              <a:t>Federated safety gates / 20</a:t>
             </a:r>
           </a:p>
         </p:txBody>
@@ -19875,7 +19881,7 @@
                 <a:ea typeface="Aptos"/>
                 <a:cs typeface="Aptos"/>
               </a:rPr>
-              <a:t>Dagents wins on control, portability, and recoverability—not on lowest initial effort / 17</a:t>
+              <a:t>Dagents wins on control, portability, and recoverability—not on lowest initial effort / 27</a:t>
             </a:r>
           </a:p>
         </p:txBody>
@@ -21955,7 +21961,7 @@
                 <a:ea typeface="Aptos"/>
                 <a:cs typeface="Aptos"/>
               </a:rPr>
-              <a:t>Evidence—not calendar dates—advances the federation / 18</a:t>
+              <a:t>Evidence—not calendar dates—advances the federation / 28</a:t>
             </a:r>
           </a:p>
         </p:txBody>
@@ -22781,7 +22787,7 @@
                 <a:ea typeface="Aptos"/>
                 <a:cs typeface="Aptos"/>
               </a:rPr>
-              <a:t>Set measured baselines before targets; do not borrow NVIDIA study results as project goals / 19</a:t>
+              <a:t>Set measured baselines before targets; do not borrow NVIDIA study results as project goals / 29</a:t>
             </a:r>
           </a:p>
         </p:txBody>
@@ -23553,7 +23559,7 @@
                 <a:ea typeface="Aptos"/>
                 <a:cs typeface="Aptos"/>
               </a:rPr>
-              <a:t>Dagents Federated Healthcare / 20</a:t>
+              <a:t>Dagents Federated Healthcare / 30</a:t>
             </a:r>
           </a:p>
         </p:txBody>
@@ -25633,7 +25639,7 @@
                 <a:ea typeface="Aptos"/>
                 <a:cs typeface="Aptos"/>
               </a:rPr>
-              <a:t>Federated healthcare glossary / 21</a:t>
+              <a:t>Federated healthcare glossary / 31</a:t>
             </a:r>
           </a:p>
         </p:txBody>
@@ -36955,6 +36961,4328 @@
 </p:sld>
 </file>
 
+<file path=ppt/slides/slide36.xml><?xml version="1.0" encoding="utf-8"?>
+<p:sld xmlns:a="http://schemas.openxmlformats.org/drawingml/2006/main" xmlns:p="http://schemas.openxmlformats.org/presentationml/2006/main" xmlns:r="http://schemas.openxmlformats.org/officeDocument/2006/relationships">
+  <p:cSld>
+    <p:bg>
+      <p:bgPr>
+        <a:solidFill>
+          <a:srgbClr val="F7F3EA"/>
+        </a:solidFill>
+        <a:effectLst/>
+      </p:bgPr>
+    </p:bg>
+    <p:spTree>
+      <p:nvGrpSpPr>
+        <p:cNvPr id="1" name=""/>
+        <p:cNvGrpSpPr/>
+        <p:nvPr/>
+      </p:nvGrpSpPr>
+      <p:grpSpPr/>
+      <p:sp>
+        <p:nvSpPr>
+          <p:cNvPr id="2" name="TextBox 1"/>
+          <p:cNvSpPr txBox="1"/>
+          <p:nvPr/>
+        </p:nvSpPr>
+        <p:spPr>
+          <a:xfrm>
+            <a:off x="548640" y="320040"/>
+            <a:ext cx="2377440" cy="292608"/>
+          </a:xfrm>
+          <a:prstGeom prst="rect">
+            <a:avLst/>
+          </a:prstGeom>
+          <a:noFill/>
+        </p:spPr>
+        <p:txBody>
+          <a:bodyPr wrap="square">
+            <a:noAutofit/>
+          </a:bodyPr>
+          <a:lstStyle/>
+          <a:p>
+            <a:r>
+              <a:rPr sz="1300" b="1">
+                <a:solidFill>
+                  <a:srgbClr val="53635B"/>
+                </a:solidFill>
+                <a:latin typeface="Aptos"/>
+              </a:rPr>
+              <a:t>GRAILS</a:t>
+            </a:r>
+          </a:p>
+        </p:txBody>
+      </p:sp>
+      <p:sp>
+        <p:nvSpPr>
+          <p:cNvPr id="3" name="TextBox 2"/>
+          <p:cNvSpPr txBox="1"/>
+          <p:nvPr/>
+        </p:nvSpPr>
+        <p:spPr>
+          <a:xfrm>
+            <a:off x="548640" y="658368"/>
+            <a:ext cx="10424160" cy="594360"/>
+          </a:xfrm>
+          <a:prstGeom prst="rect">
+            <a:avLst/>
+          </a:prstGeom>
+          <a:noFill/>
+        </p:spPr>
+        <p:txBody>
+          <a:bodyPr wrap="square">
+            <a:noAutofit/>
+          </a:bodyPr>
+          <a:lstStyle/>
+          <a:p>
+            <a:r>
+              <a:rPr sz="2900" b="1">
+                <a:solidFill>
+                  <a:srgbClr val="15201B"/>
+                </a:solidFill>
+                <a:latin typeface="Aptos"/>
+              </a:rPr>
+              <a:t>A published way to decide who may see what.</a:t>
+            </a:r>
+          </a:p>
+        </p:txBody>
+      </p:sp>
+      <p:sp>
+        <p:nvSpPr>
+          <p:cNvPr id="4" name="TextBox 3"/>
+          <p:cNvSpPr txBox="1"/>
+          <p:nvPr/>
+        </p:nvSpPr>
+        <p:spPr>
+          <a:xfrm>
+            <a:off x="566928" y="1225296"/>
+            <a:ext cx="9784080" cy="521207"/>
+          </a:xfrm>
+          <a:prstGeom prst="rect">
+            <a:avLst/>
+          </a:prstGeom>
+          <a:noFill/>
+        </p:spPr>
+        <p:txBody>
+          <a:bodyPr wrap="square">
+            <a:noAutofit/>
+          </a:bodyPr>
+          <a:lstStyle/>
+          <a:p>
+            <a:r>
+              <a:rPr sz="1400" b="0">
+                <a:solidFill>
+                  <a:srgbClr val="53635B"/>
+                </a:solidFill>
+                <a:latin typeface="Aptos"/>
+              </a:rPr>
+              <a:t>GRAILS keeps the ethics rules out of the normal application code, so a policy change does not become a code change.</a:t>
+            </a:r>
+          </a:p>
+        </p:txBody>
+      </p:sp>
+      <p:sp>
+        <p:nvSpPr>
+          <p:cNvPr id="5" name="Rounded Rectangle 4"/>
+          <p:cNvSpPr/>
+          <p:nvPr/>
+        </p:nvSpPr>
+        <p:spPr>
+          <a:xfrm>
+            <a:off x="777240" y="1737360"/>
+            <a:ext cx="4892040" cy="1143000"/>
+          </a:xfrm>
+          <a:prstGeom prst="roundRect">
+            <a:avLst/>
+          </a:prstGeom>
+          <a:solidFill>
+            <a:srgbClr val="DCEBE1"/>
+          </a:solidFill>
+          <a:ln w="12700">
+            <a:solidFill>
+              <a:srgbClr val="B9C2BB"/>
+            </a:solidFill>
+          </a:ln>
+          <a:effectLst/>
+        </p:spPr>
+        <p:style>
+          <a:lnRef idx="1">
+            <a:schemeClr val="accent1"/>
+          </a:lnRef>
+          <a:fillRef idx="3">
+            <a:schemeClr val="accent1"/>
+          </a:fillRef>
+          <a:effectRef idx="2">
+            <a:schemeClr val="accent1"/>
+          </a:effectRef>
+          <a:fontRef idx="minor">
+            <a:schemeClr val="lt1"/>
+          </a:fontRef>
+        </p:style>
+        <p:txBody>
+          <a:bodyPr rtlCol="0" anchor="ctr"/>
+          <a:lstStyle/>
+          <a:p/>
+        </p:txBody>
+      </p:sp>
+      <p:sp>
+        <p:nvSpPr>
+          <p:cNvPr id="6" name="TextBox 5"/>
+          <p:cNvSpPr txBox="1"/>
+          <p:nvPr/>
+        </p:nvSpPr>
+        <p:spPr>
+          <a:xfrm>
+            <a:off x="941832" y="1883664"/>
+            <a:ext cx="4572000" cy="320040"/>
+          </a:xfrm>
+          <a:prstGeom prst="rect">
+            <a:avLst/>
+          </a:prstGeom>
+          <a:noFill/>
+        </p:spPr>
+        <p:txBody>
+          <a:bodyPr wrap="square">
+            <a:noAutofit/>
+          </a:bodyPr>
+          <a:lstStyle/>
+          <a:p>
+            <a:r>
+              <a:rPr sz="1500" b="1">
+                <a:solidFill>
+                  <a:srgbClr val="15201B"/>
+                </a:solidFill>
+                <a:latin typeface="Aptos"/>
+              </a:rPr>
+              <a:t>Two parts</a:t>
+            </a:r>
+          </a:p>
+        </p:txBody>
+      </p:sp>
+      <p:sp>
+        <p:nvSpPr>
+          <p:cNvPr id="7" name="TextBox 6"/>
+          <p:cNvSpPr txBox="1"/>
+          <p:nvPr/>
+        </p:nvSpPr>
+        <p:spPr>
+          <a:xfrm>
+            <a:off x="941832" y="2267712"/>
+            <a:ext cx="4572000" cy="484631"/>
+          </a:xfrm>
+          <a:prstGeom prst="rect">
+            <a:avLst/>
+          </a:prstGeom>
+          <a:noFill/>
+        </p:spPr>
+        <p:txBody>
+          <a:bodyPr wrap="square">
+            <a:noAutofit/>
+          </a:bodyPr>
+          <a:lstStyle/>
+          <a:p>
+            <a:r>
+              <a:rPr sz="1200" b="0">
+                <a:solidFill>
+                  <a:srgbClr val="53635B"/>
+                </a:solidFill>
+                <a:latin typeface="Aptos"/>
+              </a:rPr>
+              <a:t>The Rails work out what protection a request needs. The Guard applies it. Deciding and enforcing stay separate.</a:t>
+            </a:r>
+          </a:p>
+        </p:txBody>
+      </p:sp>
+      <p:sp>
+        <p:nvSpPr>
+          <p:cNvPr id="8" name="Rounded Rectangle 7"/>
+          <p:cNvSpPr/>
+          <p:nvPr/>
+        </p:nvSpPr>
+        <p:spPr>
+          <a:xfrm>
+            <a:off x="6217920" y="1737360"/>
+            <a:ext cx="4892040" cy="1143000"/>
+          </a:xfrm>
+          <a:prstGeom prst="roundRect">
+            <a:avLst/>
+          </a:prstGeom>
+          <a:solidFill>
+            <a:srgbClr val="DCE7F1"/>
+          </a:solidFill>
+          <a:ln w="12700">
+            <a:solidFill>
+              <a:srgbClr val="B9C2BB"/>
+            </a:solidFill>
+          </a:ln>
+          <a:effectLst/>
+        </p:spPr>
+        <p:style>
+          <a:lnRef idx="1">
+            <a:schemeClr val="accent1"/>
+          </a:lnRef>
+          <a:fillRef idx="3">
+            <a:schemeClr val="accent1"/>
+          </a:fillRef>
+          <a:effectRef idx="2">
+            <a:schemeClr val="accent1"/>
+          </a:effectRef>
+          <a:fontRef idx="minor">
+            <a:schemeClr val="lt1"/>
+          </a:fontRef>
+        </p:style>
+        <p:txBody>
+          <a:bodyPr rtlCol="0" anchor="ctr"/>
+          <a:lstStyle/>
+          <a:p/>
+        </p:txBody>
+      </p:sp>
+      <p:sp>
+        <p:nvSpPr>
+          <p:cNvPr id="9" name="TextBox 8"/>
+          <p:cNvSpPr txBox="1"/>
+          <p:nvPr/>
+        </p:nvSpPr>
+        <p:spPr>
+          <a:xfrm>
+            <a:off x="6382512" y="1883664"/>
+            <a:ext cx="4572000" cy="320040"/>
+          </a:xfrm>
+          <a:prstGeom prst="rect">
+            <a:avLst/>
+          </a:prstGeom>
+          <a:noFill/>
+        </p:spPr>
+        <p:txBody>
+          <a:bodyPr wrap="square">
+            <a:noAutofit/>
+          </a:bodyPr>
+          <a:lstStyle/>
+          <a:p>
+            <a:r>
+              <a:rPr sz="1500" b="1">
+                <a:solidFill>
+                  <a:srgbClr val="15201B"/>
+                </a:solidFill>
+                <a:latin typeface="Aptos"/>
+              </a:rPr>
+              <a:t>Three questions</a:t>
+            </a:r>
+          </a:p>
+        </p:txBody>
+      </p:sp>
+      <p:sp>
+        <p:nvSpPr>
+          <p:cNvPr id="10" name="TextBox 9"/>
+          <p:cNvSpPr txBox="1"/>
+          <p:nvPr/>
+        </p:nvSpPr>
+        <p:spPr>
+          <a:xfrm>
+            <a:off x="6382512" y="2267712"/>
+            <a:ext cx="4572000" cy="484631"/>
+          </a:xfrm>
+          <a:prstGeom prst="rect">
+            <a:avLst/>
+          </a:prstGeom>
+          <a:noFill/>
+        </p:spPr>
+        <p:txBody>
+          <a:bodyPr wrap="square">
+            <a:noAutofit/>
+          </a:bodyPr>
+          <a:lstStyle/>
+          <a:p>
+            <a:r>
+              <a:rPr sz="1200" b="0">
+                <a:solidFill>
+                  <a:srgbClr val="53635B"/>
+                </a:solidFill>
+                <a:latin typeface="Aptos"/>
+              </a:rPr>
+              <a:t>How sensitive is the data? How far do we trust who is asking? How much are they asking for?</a:t>
+            </a:r>
+          </a:p>
+        </p:txBody>
+      </p:sp>
+      <p:sp>
+        <p:nvSpPr>
+          <p:cNvPr id="11" name="Rounded Rectangle 10"/>
+          <p:cNvSpPr/>
+          <p:nvPr/>
+        </p:nvSpPr>
+        <p:spPr>
+          <a:xfrm>
+            <a:off x="777240" y="3383280"/>
+            <a:ext cx="4892040" cy="1143000"/>
+          </a:xfrm>
+          <a:prstGeom prst="roundRect">
+            <a:avLst/>
+          </a:prstGeom>
+          <a:solidFill>
+            <a:srgbClr val="F4E8D0"/>
+          </a:solidFill>
+          <a:ln w="12700">
+            <a:solidFill>
+              <a:srgbClr val="B9C2BB"/>
+            </a:solidFill>
+          </a:ln>
+          <a:effectLst/>
+        </p:spPr>
+        <p:style>
+          <a:lnRef idx="1">
+            <a:schemeClr val="accent1"/>
+          </a:lnRef>
+          <a:fillRef idx="3">
+            <a:schemeClr val="accent1"/>
+          </a:fillRef>
+          <a:effectRef idx="2">
+            <a:schemeClr val="accent1"/>
+          </a:effectRef>
+          <a:fontRef idx="minor">
+            <a:schemeClr val="lt1"/>
+          </a:fontRef>
+        </p:style>
+        <p:txBody>
+          <a:bodyPr rtlCol="0" anchor="ctr"/>
+          <a:lstStyle/>
+          <a:p/>
+        </p:txBody>
+      </p:sp>
+      <p:sp>
+        <p:nvSpPr>
+          <p:cNvPr id="12" name="TextBox 11"/>
+          <p:cNvSpPr txBox="1"/>
+          <p:nvPr/>
+        </p:nvSpPr>
+        <p:spPr>
+          <a:xfrm>
+            <a:off x="941832" y="3529584"/>
+            <a:ext cx="4572000" cy="320040"/>
+          </a:xfrm>
+          <a:prstGeom prst="rect">
+            <a:avLst/>
+          </a:prstGeom>
+          <a:noFill/>
+        </p:spPr>
+        <p:txBody>
+          <a:bodyPr wrap="square">
+            <a:noAutofit/>
+          </a:bodyPr>
+          <a:lstStyle/>
+          <a:p>
+            <a:r>
+              <a:rPr sz="1500" b="1">
+                <a:solidFill>
+                  <a:srgbClr val="15201B"/>
+                </a:solidFill>
+                <a:latin typeface="Aptos"/>
+              </a:rPr>
+              <a:t>Added, not rebuilt</a:t>
+            </a:r>
+          </a:p>
+        </p:txBody>
+      </p:sp>
+      <p:sp>
+        <p:nvSpPr>
+          <p:cNvPr id="13" name="TextBox 12"/>
+          <p:cNvSpPr txBox="1"/>
+          <p:nvPr/>
+        </p:nvSpPr>
+        <p:spPr>
+          <a:xfrm>
+            <a:off x="941832" y="3913632"/>
+            <a:ext cx="4572000" cy="484631"/>
+          </a:xfrm>
+          <a:prstGeom prst="rect">
+            <a:avLst/>
+          </a:prstGeom>
+          <a:noFill/>
+        </p:spPr>
+        <p:txBody>
+          <a:bodyPr wrap="square">
+            <a:noAutofit/>
+          </a:bodyPr>
+          <a:lstStyle/>
+          <a:p>
+            <a:r>
+              <a:rPr sz="1200" b="0">
+                <a:solidFill>
+                  <a:srgbClr val="53635B"/>
+                </a:solidFill>
+                <a:latin typeface="Aptos"/>
+              </a:rPr>
+              <a:t>It plugs into software that already exists. The stroke pathway is not redesigned to add ethics to it.</a:t>
+            </a:r>
+          </a:p>
+        </p:txBody>
+      </p:sp>
+      <p:sp>
+        <p:nvSpPr>
+          <p:cNvPr id="14" name="Rounded Rectangle 13"/>
+          <p:cNvSpPr/>
+          <p:nvPr/>
+        </p:nvSpPr>
+        <p:spPr>
+          <a:xfrm>
+            <a:off x="6217920" y="3383280"/>
+            <a:ext cx="4892040" cy="1143000"/>
+          </a:xfrm>
+          <a:prstGeom prst="roundRect">
+            <a:avLst/>
+          </a:prstGeom>
+          <a:solidFill>
+            <a:srgbClr val="E9E1FA"/>
+          </a:solidFill>
+          <a:ln w="12700">
+            <a:solidFill>
+              <a:srgbClr val="B9C2BB"/>
+            </a:solidFill>
+          </a:ln>
+          <a:effectLst/>
+        </p:spPr>
+        <p:style>
+          <a:lnRef idx="1">
+            <a:schemeClr val="accent1"/>
+          </a:lnRef>
+          <a:fillRef idx="3">
+            <a:schemeClr val="accent1"/>
+          </a:fillRef>
+          <a:effectRef idx="2">
+            <a:schemeClr val="accent1"/>
+          </a:effectRef>
+          <a:fontRef idx="minor">
+            <a:schemeClr val="lt1"/>
+          </a:fontRef>
+        </p:style>
+        <p:txBody>
+          <a:bodyPr rtlCol="0" anchor="ctr"/>
+          <a:lstStyle/>
+          <a:p/>
+        </p:txBody>
+      </p:sp>
+      <p:sp>
+        <p:nvSpPr>
+          <p:cNvPr id="15" name="TextBox 14"/>
+          <p:cNvSpPr txBox="1"/>
+          <p:nvPr/>
+        </p:nvSpPr>
+        <p:spPr>
+          <a:xfrm>
+            <a:off x="6382512" y="3529584"/>
+            <a:ext cx="4572000" cy="320040"/>
+          </a:xfrm>
+          <a:prstGeom prst="rect">
+            <a:avLst/>
+          </a:prstGeom>
+          <a:noFill/>
+        </p:spPr>
+        <p:txBody>
+          <a:bodyPr wrap="square">
+            <a:noAutofit/>
+          </a:bodyPr>
+          <a:lstStyle/>
+          <a:p>
+            <a:r>
+              <a:rPr sz="1500" b="1">
+                <a:solidFill>
+                  <a:srgbClr val="15201B"/>
+                </a:solidFill>
+                <a:latin typeface="Aptos"/>
+              </a:rPr>
+              <a:t>Wider than privacy</a:t>
+            </a:r>
+          </a:p>
+        </p:txBody>
+      </p:sp>
+      <p:sp>
+        <p:nvSpPr>
+          <p:cNvPr id="16" name="TextBox 15"/>
+          <p:cNvSpPr txBox="1"/>
+          <p:nvPr/>
+        </p:nvSpPr>
+        <p:spPr>
+          <a:xfrm>
+            <a:off x="6382512" y="3913632"/>
+            <a:ext cx="4572000" cy="484631"/>
+          </a:xfrm>
+          <a:prstGeom prst="rect">
+            <a:avLst/>
+          </a:prstGeom>
+          <a:noFill/>
+        </p:spPr>
+        <p:txBody>
+          <a:bodyPr wrap="square">
+            <a:noAutofit/>
+          </a:bodyPr>
+          <a:lstStyle/>
+          <a:p>
+            <a:r>
+              <a:rPr sz="1200" b="0">
+                <a:solidFill>
+                  <a:srgbClr val="53635B"/>
+                </a:solidFill>
+                <a:latin typeface="Aptos"/>
+              </a:rPr>
+              <a:t>Privacy is the paper's worked example. The same shape extends to fairness, transparency, and security.</a:t>
+            </a:r>
+          </a:p>
+        </p:txBody>
+      </p:sp>
+      <p:sp>
+        <p:nvSpPr>
+          <p:cNvPr id="17" name="TextBox 16"/>
+          <p:cNvSpPr txBox="1"/>
+          <p:nvPr/>
+        </p:nvSpPr>
+        <p:spPr>
+          <a:xfrm>
+            <a:off x="914400" y="4983480"/>
+            <a:ext cx="9875520" cy="457200"/>
+          </a:xfrm>
+          <a:prstGeom prst="rect">
+            <a:avLst/>
+          </a:prstGeom>
+          <a:noFill/>
+        </p:spPr>
+        <p:txBody>
+          <a:bodyPr wrap="square">
+            <a:noAutofit/>
+          </a:bodyPr>
+          <a:lstStyle/>
+          <a:p>
+            <a:r>
+              <a:rPr sz="1200" b="1">
+                <a:solidFill>
+                  <a:srgbClr val="15201B"/>
+                </a:solidFill>
+                <a:latin typeface="Aptos"/>
+              </a:rPr>
+              <a:t>Access rules based on job titles alone cannot express “this person, this field, this purpose, today”. GRAILS can.</a:t>
+            </a:r>
+          </a:p>
+        </p:txBody>
+      </p:sp>
+      <p:sp>
+        <p:nvSpPr>
+          <p:cNvPr id="18" name="TextBox 17"/>
+          <p:cNvSpPr txBox="1"/>
+          <p:nvPr/>
+        </p:nvSpPr>
+        <p:spPr>
+          <a:xfrm>
+            <a:off x="566928" y="6355080"/>
+            <a:ext cx="5669280" cy="274320"/>
+          </a:xfrm>
+          <a:prstGeom prst="rect">
+            <a:avLst/>
+          </a:prstGeom>
+          <a:noFill/>
+        </p:spPr>
+        <p:txBody>
+          <a:bodyPr wrap="square">
+            <a:noAutofit/>
+          </a:bodyPr>
+          <a:lstStyle/>
+          <a:p>
+            <a:r>
+              <a:rPr sz="800" b="0">
+                <a:solidFill>
+                  <a:srgbClr val="53635B"/>
+                </a:solidFill>
+                <a:latin typeface="Aptos"/>
+              </a:rPr>
+              <a:t>Kulkarni &amp; Ramanathan, AIES 2025, IIIT Bangalore / 21</a:t>
+            </a:r>
+          </a:p>
+        </p:txBody>
+      </p:sp>
+    </p:spTree>
+  </p:cSld>
+  <p:clrMapOvr>
+    <a:masterClrMapping/>
+  </p:clrMapOvr>
+</p:sld>
+</file>
+
+<file path=ppt/slides/slide37.xml><?xml version="1.0" encoding="utf-8"?>
+<p:sld xmlns:a="http://schemas.openxmlformats.org/drawingml/2006/main" xmlns:p="http://schemas.openxmlformats.org/presentationml/2006/main" xmlns:r="http://schemas.openxmlformats.org/officeDocument/2006/relationships">
+  <p:cSld>
+    <p:bg>
+      <p:bgPr>
+        <a:solidFill>
+          <a:srgbClr val="F7F3EA"/>
+        </a:solidFill>
+        <a:effectLst/>
+      </p:bgPr>
+    </p:bg>
+    <p:spTree>
+      <p:nvGrpSpPr>
+        <p:cNvPr id="1" name=""/>
+        <p:cNvGrpSpPr/>
+        <p:nvPr/>
+      </p:nvGrpSpPr>
+      <p:grpSpPr/>
+      <p:sp>
+        <p:nvSpPr>
+          <p:cNvPr id="2" name="TextBox 1"/>
+          <p:cNvSpPr txBox="1"/>
+          <p:nvPr/>
+        </p:nvSpPr>
+        <p:spPr>
+          <a:xfrm>
+            <a:off x="548640" y="320040"/>
+            <a:ext cx="2377440" cy="292608"/>
+          </a:xfrm>
+          <a:prstGeom prst="rect">
+            <a:avLst/>
+          </a:prstGeom>
+          <a:noFill/>
+        </p:spPr>
+        <p:txBody>
+          <a:bodyPr wrap="square">
+            <a:noAutofit/>
+          </a:bodyPr>
+          <a:lstStyle/>
+          <a:p>
+            <a:r>
+              <a:rPr sz="1300" b="1">
+                <a:solidFill>
+                  <a:srgbClr val="53635B"/>
+                </a:solidFill>
+                <a:latin typeface="Aptos"/>
+              </a:rPr>
+              <a:t>GRAILS + STROKE</a:t>
+            </a:r>
+          </a:p>
+        </p:txBody>
+      </p:sp>
+      <p:sp>
+        <p:nvSpPr>
+          <p:cNvPr id="3" name="TextBox 2"/>
+          <p:cNvSpPr txBox="1"/>
+          <p:nvPr/>
+        </p:nvSpPr>
+        <p:spPr>
+          <a:xfrm>
+            <a:off x="548640" y="658368"/>
+            <a:ext cx="10424160" cy="594360"/>
+          </a:xfrm>
+          <a:prstGeom prst="rect">
+            <a:avLst/>
+          </a:prstGeom>
+          <a:noFill/>
+        </p:spPr>
+        <p:txBody>
+          <a:bodyPr wrap="square">
+            <a:noAutofit/>
+          </a:bodyPr>
+          <a:lstStyle/>
+          <a:p>
+            <a:r>
+              <a:rPr sz="2900" b="1">
+                <a:solidFill>
+                  <a:srgbClr val="15201B"/>
+                </a:solidFill>
+                <a:latin typeface="Aptos"/>
+              </a:rPr>
+              <a:t>The three dials, using stroke data.</a:t>
+            </a:r>
+          </a:p>
+        </p:txBody>
+      </p:sp>
+      <p:sp>
+        <p:nvSpPr>
+          <p:cNvPr id="4" name="TextBox 3"/>
+          <p:cNvSpPr txBox="1"/>
+          <p:nvPr/>
+        </p:nvSpPr>
+        <p:spPr>
+          <a:xfrm>
+            <a:off x="566928" y="1225296"/>
+            <a:ext cx="9784080" cy="521207"/>
+          </a:xfrm>
+          <a:prstGeom prst="rect">
+            <a:avLst/>
+          </a:prstGeom>
+          <a:noFill/>
+        </p:spPr>
+        <p:txBody>
+          <a:bodyPr wrap="square">
+            <a:noAutofit/>
+          </a:bodyPr>
+          <a:lstStyle/>
+          <a:p>
+            <a:r>
+              <a:rPr sz="1400" b="0">
+                <a:solidFill>
+                  <a:srgbClr val="53635B"/>
+                </a:solidFill>
+                <a:latin typeface="Aptos"/>
+              </a:rPr>
+              <a:t>The same request can get a different answer, depending on where the three dials sit.</a:t>
+            </a:r>
+          </a:p>
+        </p:txBody>
+      </p:sp>
+      <p:sp>
+        <p:nvSpPr>
+          <p:cNvPr id="5" name="Rounded Rectangle 4"/>
+          <p:cNvSpPr/>
+          <p:nvPr/>
+        </p:nvSpPr>
+        <p:spPr>
+          <a:xfrm>
+            <a:off x="777240" y="1874519"/>
+            <a:ext cx="3246120" cy="2651760"/>
+          </a:xfrm>
+          <a:prstGeom prst="roundRect">
+            <a:avLst/>
+          </a:prstGeom>
+          <a:solidFill>
+            <a:srgbClr val="DCEBE1"/>
+          </a:solidFill>
+          <a:ln w="12700">
+            <a:solidFill>
+              <a:srgbClr val="B9C2BB"/>
+            </a:solidFill>
+          </a:ln>
+          <a:effectLst/>
+        </p:spPr>
+        <p:style>
+          <a:lnRef idx="1">
+            <a:schemeClr val="accent1"/>
+          </a:lnRef>
+          <a:fillRef idx="3">
+            <a:schemeClr val="accent1"/>
+          </a:fillRef>
+          <a:effectRef idx="2">
+            <a:schemeClr val="accent1"/>
+          </a:effectRef>
+          <a:fontRef idx="minor">
+            <a:schemeClr val="lt1"/>
+          </a:fontRef>
+        </p:style>
+        <p:txBody>
+          <a:bodyPr rtlCol="0" anchor="ctr"/>
+          <a:lstStyle/>
+          <a:p/>
+        </p:txBody>
+      </p:sp>
+      <p:sp>
+        <p:nvSpPr>
+          <p:cNvPr id="6" name="TextBox 5"/>
+          <p:cNvSpPr txBox="1"/>
+          <p:nvPr/>
+        </p:nvSpPr>
+        <p:spPr>
+          <a:xfrm>
+            <a:off x="941832" y="2020824"/>
+            <a:ext cx="2926079" cy="320040"/>
+          </a:xfrm>
+          <a:prstGeom prst="rect">
+            <a:avLst/>
+          </a:prstGeom>
+          <a:noFill/>
+        </p:spPr>
+        <p:txBody>
+          <a:bodyPr wrap="square">
+            <a:noAutofit/>
+          </a:bodyPr>
+          <a:lstStyle/>
+          <a:p>
+            <a:r>
+              <a:rPr sz="1500" b="1">
+                <a:solidFill>
+                  <a:srgbClr val="15201B"/>
+                </a:solidFill>
+                <a:latin typeface="Aptos"/>
+              </a:rPr>
+              <a:t>HOW SENSITIVE</a:t>
+            </a:r>
+          </a:p>
+        </p:txBody>
+      </p:sp>
+      <p:sp>
+        <p:nvSpPr>
+          <p:cNvPr id="7" name="TextBox 6"/>
+          <p:cNvSpPr txBox="1"/>
+          <p:nvPr/>
+        </p:nvSpPr>
+        <p:spPr>
+          <a:xfrm>
+            <a:off x="941832" y="2404872"/>
+            <a:ext cx="2926079" cy="1993391"/>
+          </a:xfrm>
+          <a:prstGeom prst="rect">
+            <a:avLst/>
+          </a:prstGeom>
+          <a:noFill/>
+        </p:spPr>
+        <p:txBody>
+          <a:bodyPr wrap="square">
+            <a:noAutofit/>
+          </a:bodyPr>
+          <a:lstStyle/>
+          <a:p>
+            <a:r>
+              <a:rPr sz="1200" b="0">
+                <a:solidFill>
+                  <a:srgbClr val="53635B"/>
+                </a:solidFill>
+                <a:latin typeface="Aptos"/>
+              </a:rPr>
+              <a:t>A ward name is low. The time symptoms started is medium. The brain scan and the final diagnosis are high.</a:t>
+            </a:r>
+          </a:p>
+        </p:txBody>
+      </p:sp>
+      <p:sp>
+        <p:nvSpPr>
+          <p:cNvPr id="8" name="TextBox 7"/>
+          <p:cNvSpPr txBox="1"/>
+          <p:nvPr/>
+        </p:nvSpPr>
+        <p:spPr>
+          <a:xfrm>
+            <a:off x="4069079" y="2944368"/>
+            <a:ext cx="320040" cy="521207"/>
+          </a:xfrm>
+          <a:prstGeom prst="rect">
+            <a:avLst/>
+          </a:prstGeom>
+          <a:noFill/>
+        </p:spPr>
+        <p:txBody>
+          <a:bodyPr wrap="square">
+            <a:noAutofit/>
+          </a:bodyPr>
+          <a:lstStyle/>
+          <a:p>
+            <a:r>
+              <a:rPr sz="2800" b="1">
+                <a:solidFill>
+                  <a:srgbClr val="53635B"/>
+                </a:solidFill>
+                <a:latin typeface="Aptos"/>
+              </a:rPr>
+              <a:t>→</a:t>
+            </a:r>
+          </a:p>
+        </p:txBody>
+      </p:sp>
+      <p:sp>
+        <p:nvSpPr>
+          <p:cNvPr id="9" name="Rounded Rectangle 8"/>
+          <p:cNvSpPr/>
+          <p:nvPr/>
+        </p:nvSpPr>
+        <p:spPr>
+          <a:xfrm>
+            <a:off x="4389120" y="1874519"/>
+            <a:ext cx="3246120" cy="2651760"/>
+          </a:xfrm>
+          <a:prstGeom prst="roundRect">
+            <a:avLst/>
+          </a:prstGeom>
+          <a:solidFill>
+            <a:srgbClr val="DCE7F1"/>
+          </a:solidFill>
+          <a:ln w="12700">
+            <a:solidFill>
+              <a:srgbClr val="B9C2BB"/>
+            </a:solidFill>
+          </a:ln>
+          <a:effectLst/>
+        </p:spPr>
+        <p:style>
+          <a:lnRef idx="1">
+            <a:schemeClr val="accent1"/>
+          </a:lnRef>
+          <a:fillRef idx="3">
+            <a:schemeClr val="accent1"/>
+          </a:fillRef>
+          <a:effectRef idx="2">
+            <a:schemeClr val="accent1"/>
+          </a:effectRef>
+          <a:fontRef idx="minor">
+            <a:schemeClr val="lt1"/>
+          </a:fontRef>
+        </p:style>
+        <p:txBody>
+          <a:bodyPr rtlCol="0" anchor="ctr"/>
+          <a:lstStyle/>
+          <a:p/>
+        </p:txBody>
+      </p:sp>
+      <p:sp>
+        <p:nvSpPr>
+          <p:cNvPr id="10" name="TextBox 9"/>
+          <p:cNvSpPr txBox="1"/>
+          <p:nvPr/>
+        </p:nvSpPr>
+        <p:spPr>
+          <a:xfrm>
+            <a:off x="4553712" y="2020824"/>
+            <a:ext cx="2926079" cy="320040"/>
+          </a:xfrm>
+          <a:prstGeom prst="rect">
+            <a:avLst/>
+          </a:prstGeom>
+          <a:noFill/>
+        </p:spPr>
+        <p:txBody>
+          <a:bodyPr wrap="square">
+            <a:noAutofit/>
+          </a:bodyPr>
+          <a:lstStyle/>
+          <a:p>
+            <a:r>
+              <a:rPr sz="1500" b="1">
+                <a:solidFill>
+                  <a:srgbClr val="15201B"/>
+                </a:solidFill>
+                <a:latin typeface="Aptos"/>
+              </a:rPr>
+              <a:t>HOW TRUSTED</a:t>
+            </a:r>
+          </a:p>
+        </p:txBody>
+      </p:sp>
+      <p:sp>
+        <p:nvSpPr>
+          <p:cNvPr id="11" name="TextBox 10"/>
+          <p:cNvSpPr txBox="1"/>
+          <p:nvPr/>
+        </p:nvSpPr>
+        <p:spPr>
+          <a:xfrm>
+            <a:off x="4553712" y="2404872"/>
+            <a:ext cx="2926079" cy="1993391"/>
+          </a:xfrm>
+          <a:prstGeom prst="rect">
+            <a:avLst/>
+          </a:prstGeom>
+          <a:noFill/>
+        </p:spPr>
+        <p:txBody>
+          <a:bodyPr wrap="square">
+            <a:noAutofit/>
+          </a:bodyPr>
+          <a:lstStyle/>
+          <a:p>
+            <a:r>
+              <a:rPr sz="1200" b="0">
+                <a:solidFill>
+                  <a:srgbClr val="53635B"/>
+                </a:solidFill>
+                <a:latin typeface="Aptos"/>
+              </a:rPr>
+              <a:t>A treating clinician on the stroke pathway, an internal audit reviewer, and an outside researcher are not the same requester.</a:t>
+            </a:r>
+          </a:p>
+        </p:txBody>
+      </p:sp>
+      <p:sp>
+        <p:nvSpPr>
+          <p:cNvPr id="12" name="TextBox 11"/>
+          <p:cNvSpPr txBox="1"/>
+          <p:nvPr/>
+        </p:nvSpPr>
+        <p:spPr>
+          <a:xfrm>
+            <a:off x="7680960" y="2944368"/>
+            <a:ext cx="320040" cy="521207"/>
+          </a:xfrm>
+          <a:prstGeom prst="rect">
+            <a:avLst/>
+          </a:prstGeom>
+          <a:noFill/>
+        </p:spPr>
+        <p:txBody>
+          <a:bodyPr wrap="square">
+            <a:noAutofit/>
+          </a:bodyPr>
+          <a:lstStyle/>
+          <a:p>
+            <a:r>
+              <a:rPr sz="2800" b="1">
+                <a:solidFill>
+                  <a:srgbClr val="53635B"/>
+                </a:solidFill>
+                <a:latin typeface="Aptos"/>
+              </a:rPr>
+              <a:t>→</a:t>
+            </a:r>
+          </a:p>
+        </p:txBody>
+      </p:sp>
+      <p:sp>
+        <p:nvSpPr>
+          <p:cNvPr id="13" name="Rounded Rectangle 12"/>
+          <p:cNvSpPr/>
+          <p:nvPr/>
+        </p:nvSpPr>
+        <p:spPr>
+          <a:xfrm>
+            <a:off x="8001000" y="1874519"/>
+            <a:ext cx="3246120" cy="2651760"/>
+          </a:xfrm>
+          <a:prstGeom prst="roundRect">
+            <a:avLst/>
+          </a:prstGeom>
+          <a:solidFill>
+            <a:srgbClr val="F4E8D0"/>
+          </a:solidFill>
+          <a:ln w="12700">
+            <a:solidFill>
+              <a:srgbClr val="B9C2BB"/>
+            </a:solidFill>
+          </a:ln>
+          <a:effectLst/>
+        </p:spPr>
+        <p:style>
+          <a:lnRef idx="1">
+            <a:schemeClr val="accent1"/>
+          </a:lnRef>
+          <a:fillRef idx="3">
+            <a:schemeClr val="accent1"/>
+          </a:fillRef>
+          <a:effectRef idx="2">
+            <a:schemeClr val="accent1"/>
+          </a:effectRef>
+          <a:fontRef idx="minor">
+            <a:schemeClr val="lt1"/>
+          </a:fontRef>
+        </p:style>
+        <p:txBody>
+          <a:bodyPr rtlCol="0" anchor="ctr"/>
+          <a:lstStyle/>
+          <a:p/>
+        </p:txBody>
+      </p:sp>
+      <p:sp>
+        <p:nvSpPr>
+          <p:cNvPr id="14" name="TextBox 13"/>
+          <p:cNvSpPr txBox="1"/>
+          <p:nvPr/>
+        </p:nvSpPr>
+        <p:spPr>
+          <a:xfrm>
+            <a:off x="8165592" y="2020824"/>
+            <a:ext cx="2926079" cy="320040"/>
+          </a:xfrm>
+          <a:prstGeom prst="rect">
+            <a:avLst/>
+          </a:prstGeom>
+          <a:noFill/>
+        </p:spPr>
+        <p:txBody>
+          <a:bodyPr wrap="square">
+            <a:noAutofit/>
+          </a:bodyPr>
+          <a:lstStyle/>
+          <a:p>
+            <a:r>
+              <a:rPr sz="1500" b="1">
+                <a:solidFill>
+                  <a:srgbClr val="15201B"/>
+                </a:solidFill>
+                <a:latin typeface="Aptos"/>
+              </a:rPr>
+              <a:t>HOW MUCH</a:t>
+            </a:r>
+          </a:p>
+        </p:txBody>
+      </p:sp>
+      <p:sp>
+        <p:nvSpPr>
+          <p:cNvPr id="15" name="TextBox 14"/>
+          <p:cNvSpPr txBox="1"/>
+          <p:nvPr/>
+        </p:nvSpPr>
+        <p:spPr>
+          <a:xfrm>
+            <a:off x="8165592" y="2404872"/>
+            <a:ext cx="2926079" cy="1993391"/>
+          </a:xfrm>
+          <a:prstGeom prst="rect">
+            <a:avLst/>
+          </a:prstGeom>
+          <a:noFill/>
+        </p:spPr>
+        <p:txBody>
+          <a:bodyPr wrap="square">
+            <a:noAutofit/>
+          </a:bodyPr>
+          <a:lstStyle/>
+          <a:p>
+            <a:r>
+              <a:rPr sz="1200" b="0">
+                <a:solidFill>
+                  <a:srgbClr val="53635B"/>
+                </a:solidFill>
+                <a:latin typeface="Aptos"/>
+              </a:rPr>
+              <a:t>One value for one patient, one patient's whole record, one field across every stroke case, or the entire table.</a:t>
+            </a:r>
+          </a:p>
+        </p:txBody>
+      </p:sp>
+      <p:sp>
+        <p:nvSpPr>
+          <p:cNvPr id="16" name="TextBox 15"/>
+          <p:cNvSpPr txBox="1"/>
+          <p:nvPr/>
+        </p:nvSpPr>
+        <p:spPr>
+          <a:xfrm>
+            <a:off x="914400" y="4892040"/>
+            <a:ext cx="9875520" cy="457200"/>
+          </a:xfrm>
+          <a:prstGeom prst="rect">
+            <a:avLst/>
+          </a:prstGeom>
+          <a:noFill/>
+        </p:spPr>
+        <p:txBody>
+          <a:bodyPr wrap="square">
+            <a:noAutofit/>
+          </a:bodyPr>
+          <a:lstStyle/>
+          <a:p>
+            <a:r>
+              <a:rPr sz="1200" b="1">
+                <a:solidFill>
+                  <a:srgbClr val="15201B"/>
+                </a:solidFill>
+                <a:latin typeface="Aptos"/>
+              </a:rPr>
+              <a:t>High sensitivity, asked for by low trust, across a whole column is the case that must never quietly default to allow.</a:t>
+            </a:r>
+          </a:p>
+        </p:txBody>
+      </p:sp>
+      <p:sp>
+        <p:nvSpPr>
+          <p:cNvPr id="17" name="TextBox 16"/>
+          <p:cNvSpPr txBox="1"/>
+          <p:nvPr/>
+        </p:nvSpPr>
+        <p:spPr>
+          <a:xfrm>
+            <a:off x="566928" y="6355080"/>
+            <a:ext cx="5669280" cy="274320"/>
+          </a:xfrm>
+          <a:prstGeom prst="rect">
+            <a:avLst/>
+          </a:prstGeom>
+          <a:noFill/>
+        </p:spPr>
+        <p:txBody>
+          <a:bodyPr wrap="square">
+            <a:noAutofit/>
+          </a:bodyPr>
+          <a:lstStyle/>
+          <a:p>
+            <a:r>
+              <a:rPr sz="800" b="0">
+                <a:solidFill>
+                  <a:srgbClr val="53635B"/>
+                </a:solidFill>
+                <a:latin typeface="Aptos"/>
+              </a:rPr>
+              <a:t>Sensitivity, trust, and how much is asked for / 22</a:t>
+            </a:r>
+          </a:p>
+        </p:txBody>
+      </p:sp>
+    </p:spTree>
+  </p:cSld>
+  <p:clrMapOvr>
+    <a:masterClrMapping/>
+  </p:clrMapOvr>
+</p:sld>
+</file>
+
+<file path=ppt/slides/slide38.xml><?xml version="1.0" encoding="utf-8"?>
+<p:sld xmlns:a="http://schemas.openxmlformats.org/drawingml/2006/main" xmlns:p="http://schemas.openxmlformats.org/presentationml/2006/main" xmlns:r="http://schemas.openxmlformats.org/officeDocument/2006/relationships">
+  <p:cSld>
+    <p:bg>
+      <p:bgPr>
+        <a:solidFill>
+          <a:srgbClr val="F7F3EA"/>
+        </a:solidFill>
+        <a:effectLst/>
+      </p:bgPr>
+    </p:bg>
+    <p:spTree>
+      <p:nvGrpSpPr>
+        <p:cNvPr id="1" name=""/>
+        <p:cNvGrpSpPr/>
+        <p:nvPr/>
+      </p:nvGrpSpPr>
+      <p:grpSpPr/>
+      <p:sp>
+        <p:nvSpPr>
+          <p:cNvPr id="2" name="TextBox 1"/>
+          <p:cNvSpPr txBox="1"/>
+          <p:nvPr/>
+        </p:nvSpPr>
+        <p:spPr>
+          <a:xfrm>
+            <a:off x="548640" y="320040"/>
+            <a:ext cx="2377440" cy="292608"/>
+          </a:xfrm>
+          <a:prstGeom prst="rect">
+            <a:avLst/>
+          </a:prstGeom>
+          <a:noFill/>
+        </p:spPr>
+        <p:txBody>
+          <a:bodyPr wrap="square">
+            <a:noAutofit/>
+          </a:bodyPr>
+          <a:lstStyle/>
+          <a:p>
+            <a:r>
+              <a:rPr sz="1300" b="1">
+                <a:solidFill>
+                  <a:srgbClr val="53635B"/>
+                </a:solidFill>
+                <a:latin typeface="Aptos"/>
+              </a:rPr>
+              <a:t>GRAILS + STROKE</a:t>
+            </a:r>
+          </a:p>
+        </p:txBody>
+      </p:sp>
+      <p:sp>
+        <p:nvSpPr>
+          <p:cNvPr id="3" name="TextBox 2"/>
+          <p:cNvSpPr txBox="1"/>
+          <p:nvPr/>
+        </p:nvSpPr>
+        <p:spPr>
+          <a:xfrm>
+            <a:off x="548640" y="658368"/>
+            <a:ext cx="10424160" cy="594360"/>
+          </a:xfrm>
+          <a:prstGeom prst="rect">
+            <a:avLst/>
+          </a:prstGeom>
+          <a:noFill/>
+        </p:spPr>
+        <p:txBody>
+          <a:bodyPr wrap="square">
+            <a:noAutofit/>
+          </a:bodyPr>
+          <a:lstStyle/>
+          <a:p>
+            <a:r>
+              <a:rPr sz="2900" b="1">
+                <a:solidFill>
+                  <a:srgbClr val="15201B"/>
+                </a:solidFill>
+                <a:latin typeface="Aptos"/>
+              </a:rPr>
+              <a:t>The same field, three different answers.</a:t>
+            </a:r>
+          </a:p>
+        </p:txBody>
+      </p:sp>
+      <p:sp>
+        <p:nvSpPr>
+          <p:cNvPr id="4" name="TextBox 3"/>
+          <p:cNvSpPr txBox="1"/>
+          <p:nvPr/>
+        </p:nvSpPr>
+        <p:spPr>
+          <a:xfrm>
+            <a:off x="566928" y="1225296"/>
+            <a:ext cx="9784080" cy="521207"/>
+          </a:xfrm>
+          <a:prstGeom prst="rect">
+            <a:avLst/>
+          </a:prstGeom>
+          <a:noFill/>
+        </p:spPr>
+        <p:txBody>
+          <a:bodyPr wrap="square">
+            <a:noAutofit/>
+          </a:bodyPr>
+          <a:lstStyle/>
+          <a:p>
+            <a:r>
+              <a:rPr sz="1400" b="0">
+                <a:solidFill>
+                  <a:srgbClr val="53635B"/>
+                </a:solidFill>
+                <a:latin typeface="Aptos"/>
+              </a:rPr>
+              <a:t>What a requester gets back depends on who they are, not only on what they asked for.</a:t>
+            </a:r>
+          </a:p>
+        </p:txBody>
+      </p:sp>
+      <p:sp>
+        <p:nvSpPr>
+          <p:cNvPr id="5" name="Rectangle 4"/>
+          <p:cNvSpPr/>
+          <p:nvPr/>
+        </p:nvSpPr>
+        <p:spPr>
+          <a:xfrm>
+            <a:off x="548640" y="1664208"/>
+            <a:ext cx="2834640" cy="676656"/>
+          </a:xfrm>
+          <a:prstGeom prst="rect">
+            <a:avLst/>
+          </a:prstGeom>
+          <a:solidFill>
+            <a:srgbClr val="F4E8D0"/>
+          </a:solidFill>
+          <a:ln w="12700">
+            <a:solidFill>
+              <a:srgbClr val="B9C2BB"/>
+            </a:solidFill>
+          </a:ln>
+          <a:effectLst/>
+        </p:spPr>
+        <p:style>
+          <a:lnRef idx="1">
+            <a:schemeClr val="accent1"/>
+          </a:lnRef>
+          <a:fillRef idx="3">
+            <a:schemeClr val="accent1"/>
+          </a:fillRef>
+          <a:effectRef idx="2">
+            <a:schemeClr val="accent1"/>
+          </a:effectRef>
+          <a:fontRef idx="minor">
+            <a:schemeClr val="lt1"/>
+          </a:fontRef>
+        </p:style>
+        <p:txBody>
+          <a:bodyPr rtlCol="0" anchor="ctr"/>
+          <a:lstStyle/>
+          <a:p/>
+        </p:txBody>
+      </p:sp>
+      <p:sp>
+        <p:nvSpPr>
+          <p:cNvPr id="6" name="TextBox 5"/>
+          <p:cNvSpPr txBox="1"/>
+          <p:nvPr/>
+        </p:nvSpPr>
+        <p:spPr>
+          <a:xfrm>
+            <a:off x="621792" y="1737360"/>
+            <a:ext cx="2688336" cy="530352"/>
+          </a:xfrm>
+          <a:prstGeom prst="rect">
+            <a:avLst/>
+          </a:prstGeom>
+          <a:noFill/>
+        </p:spPr>
+        <p:txBody>
+          <a:bodyPr wrap="square" anchor="ctr">
+            <a:noAutofit/>
+          </a:bodyPr>
+          <a:lstStyle/>
+          <a:p>
+            <a:r>
+              <a:rPr sz="1100" b="1">
+                <a:solidFill>
+                  <a:srgbClr val="15201B"/>
+                </a:solidFill>
+                <a:latin typeface="Aptos"/>
+              </a:rPr>
+              <a:t>Stroke field</a:t>
+            </a:r>
+          </a:p>
+        </p:txBody>
+      </p:sp>
+      <p:sp>
+        <p:nvSpPr>
+          <p:cNvPr id="7" name="Rectangle 6"/>
+          <p:cNvSpPr/>
+          <p:nvPr/>
+        </p:nvSpPr>
+        <p:spPr>
+          <a:xfrm>
+            <a:off x="3383280" y="1664208"/>
+            <a:ext cx="2743200" cy="676656"/>
+          </a:xfrm>
+          <a:prstGeom prst="rect">
+            <a:avLst/>
+          </a:prstGeom>
+          <a:solidFill>
+            <a:srgbClr val="F4E8D0"/>
+          </a:solidFill>
+          <a:ln w="12700">
+            <a:solidFill>
+              <a:srgbClr val="B9C2BB"/>
+            </a:solidFill>
+          </a:ln>
+          <a:effectLst/>
+        </p:spPr>
+        <p:style>
+          <a:lnRef idx="1">
+            <a:schemeClr val="accent1"/>
+          </a:lnRef>
+          <a:fillRef idx="3">
+            <a:schemeClr val="accent1"/>
+          </a:fillRef>
+          <a:effectRef idx="2">
+            <a:schemeClr val="accent1"/>
+          </a:effectRef>
+          <a:fontRef idx="minor">
+            <a:schemeClr val="lt1"/>
+          </a:fontRef>
+        </p:style>
+        <p:txBody>
+          <a:bodyPr rtlCol="0" anchor="ctr"/>
+          <a:lstStyle/>
+          <a:p/>
+        </p:txBody>
+      </p:sp>
+      <p:sp>
+        <p:nvSpPr>
+          <p:cNvPr id="8" name="TextBox 7"/>
+          <p:cNvSpPr txBox="1"/>
+          <p:nvPr/>
+        </p:nvSpPr>
+        <p:spPr>
+          <a:xfrm>
+            <a:off x="3456432" y="1737360"/>
+            <a:ext cx="2596896" cy="530352"/>
+          </a:xfrm>
+          <a:prstGeom prst="rect">
+            <a:avLst/>
+          </a:prstGeom>
+          <a:noFill/>
+        </p:spPr>
+        <p:txBody>
+          <a:bodyPr wrap="square" anchor="ctr">
+            <a:noAutofit/>
+          </a:bodyPr>
+          <a:lstStyle/>
+          <a:p>
+            <a:r>
+              <a:rPr sz="1100" b="1">
+                <a:solidFill>
+                  <a:srgbClr val="15201B"/>
+                </a:solidFill>
+                <a:latin typeface="Aptos"/>
+              </a:rPr>
+              <a:t>Treating clinician</a:t>
+            </a:r>
+          </a:p>
+        </p:txBody>
+      </p:sp>
+      <p:sp>
+        <p:nvSpPr>
+          <p:cNvPr id="9" name="Rectangle 8"/>
+          <p:cNvSpPr/>
+          <p:nvPr/>
+        </p:nvSpPr>
+        <p:spPr>
+          <a:xfrm>
+            <a:off x="6126480" y="1664208"/>
+            <a:ext cx="2926080" cy="676656"/>
+          </a:xfrm>
+          <a:prstGeom prst="rect">
+            <a:avLst/>
+          </a:prstGeom>
+          <a:solidFill>
+            <a:srgbClr val="F4E8D0"/>
+          </a:solidFill>
+          <a:ln w="12700">
+            <a:solidFill>
+              <a:srgbClr val="B9C2BB"/>
+            </a:solidFill>
+          </a:ln>
+          <a:effectLst/>
+        </p:spPr>
+        <p:style>
+          <a:lnRef idx="1">
+            <a:schemeClr val="accent1"/>
+          </a:lnRef>
+          <a:fillRef idx="3">
+            <a:schemeClr val="accent1"/>
+          </a:fillRef>
+          <a:effectRef idx="2">
+            <a:schemeClr val="accent1"/>
+          </a:effectRef>
+          <a:fontRef idx="minor">
+            <a:schemeClr val="lt1"/>
+          </a:fontRef>
+        </p:style>
+        <p:txBody>
+          <a:bodyPr rtlCol="0" anchor="ctr"/>
+          <a:lstStyle/>
+          <a:p/>
+        </p:txBody>
+      </p:sp>
+      <p:sp>
+        <p:nvSpPr>
+          <p:cNvPr id="10" name="TextBox 9"/>
+          <p:cNvSpPr txBox="1"/>
+          <p:nvPr/>
+        </p:nvSpPr>
+        <p:spPr>
+          <a:xfrm>
+            <a:off x="6199632" y="1737360"/>
+            <a:ext cx="2779776" cy="530352"/>
+          </a:xfrm>
+          <a:prstGeom prst="rect">
+            <a:avLst/>
+          </a:prstGeom>
+          <a:noFill/>
+        </p:spPr>
+        <p:txBody>
+          <a:bodyPr wrap="square" anchor="ctr">
+            <a:noAutofit/>
+          </a:bodyPr>
+          <a:lstStyle/>
+          <a:p>
+            <a:r>
+              <a:rPr sz="1100" b="1">
+                <a:solidFill>
+                  <a:srgbClr val="15201B"/>
+                </a:solidFill>
+                <a:latin typeface="Aptos"/>
+              </a:rPr>
+              <a:t>Audit reviewer</a:t>
+            </a:r>
+          </a:p>
+        </p:txBody>
+      </p:sp>
+      <p:sp>
+        <p:nvSpPr>
+          <p:cNvPr id="11" name="Rectangle 10"/>
+          <p:cNvSpPr/>
+          <p:nvPr/>
+        </p:nvSpPr>
+        <p:spPr>
+          <a:xfrm>
+            <a:off x="9052560" y="1664208"/>
+            <a:ext cx="3017520" cy="676656"/>
+          </a:xfrm>
+          <a:prstGeom prst="rect">
+            <a:avLst/>
+          </a:prstGeom>
+          <a:solidFill>
+            <a:srgbClr val="F4E8D0"/>
+          </a:solidFill>
+          <a:ln w="12700">
+            <a:solidFill>
+              <a:srgbClr val="B9C2BB"/>
+            </a:solidFill>
+          </a:ln>
+          <a:effectLst/>
+        </p:spPr>
+        <p:style>
+          <a:lnRef idx="1">
+            <a:schemeClr val="accent1"/>
+          </a:lnRef>
+          <a:fillRef idx="3">
+            <a:schemeClr val="accent1"/>
+          </a:fillRef>
+          <a:effectRef idx="2">
+            <a:schemeClr val="accent1"/>
+          </a:effectRef>
+          <a:fontRef idx="minor">
+            <a:schemeClr val="lt1"/>
+          </a:fontRef>
+        </p:style>
+        <p:txBody>
+          <a:bodyPr rtlCol="0" anchor="ctr"/>
+          <a:lstStyle/>
+          <a:p/>
+        </p:txBody>
+      </p:sp>
+      <p:sp>
+        <p:nvSpPr>
+          <p:cNvPr id="12" name="TextBox 11"/>
+          <p:cNvSpPr txBox="1"/>
+          <p:nvPr/>
+        </p:nvSpPr>
+        <p:spPr>
+          <a:xfrm>
+            <a:off x="9125712" y="1737360"/>
+            <a:ext cx="2871215" cy="530352"/>
+          </a:xfrm>
+          <a:prstGeom prst="rect">
+            <a:avLst/>
+          </a:prstGeom>
+          <a:noFill/>
+        </p:spPr>
+        <p:txBody>
+          <a:bodyPr wrap="square" anchor="ctr">
+            <a:noAutofit/>
+          </a:bodyPr>
+          <a:lstStyle/>
+          <a:p>
+            <a:r>
+              <a:rPr sz="1100" b="1">
+                <a:solidFill>
+                  <a:srgbClr val="15201B"/>
+                </a:solidFill>
+                <a:latin typeface="Aptos"/>
+              </a:rPr>
+              <a:t>Outside researcher</a:t>
+            </a:r>
+          </a:p>
+        </p:txBody>
+      </p:sp>
+      <p:sp>
+        <p:nvSpPr>
+          <p:cNvPr id="13" name="Rectangle 12"/>
+          <p:cNvSpPr/>
+          <p:nvPr/>
+        </p:nvSpPr>
+        <p:spPr>
+          <a:xfrm>
+            <a:off x="548640" y="2340864"/>
+            <a:ext cx="2834640" cy="676656"/>
+          </a:xfrm>
+          <a:prstGeom prst="rect">
+            <a:avLst/>
+          </a:prstGeom>
+          <a:solidFill>
+            <a:srgbClr val="FFFFFF"/>
+          </a:solidFill>
+          <a:ln w="12700">
+            <a:solidFill>
+              <a:srgbClr val="B9C2BB"/>
+            </a:solidFill>
+          </a:ln>
+          <a:effectLst/>
+        </p:spPr>
+        <p:style>
+          <a:lnRef idx="1">
+            <a:schemeClr val="accent1"/>
+          </a:lnRef>
+          <a:fillRef idx="3">
+            <a:schemeClr val="accent1"/>
+          </a:fillRef>
+          <a:effectRef idx="2">
+            <a:schemeClr val="accent1"/>
+          </a:effectRef>
+          <a:fontRef idx="minor">
+            <a:schemeClr val="lt1"/>
+          </a:fontRef>
+        </p:style>
+        <p:txBody>
+          <a:bodyPr rtlCol="0" anchor="ctr"/>
+          <a:lstStyle/>
+          <a:p/>
+        </p:txBody>
+      </p:sp>
+      <p:sp>
+        <p:nvSpPr>
+          <p:cNvPr id="14" name="TextBox 13"/>
+          <p:cNvSpPr txBox="1"/>
+          <p:nvPr/>
+        </p:nvSpPr>
+        <p:spPr>
+          <a:xfrm>
+            <a:off x="621792" y="2414016"/>
+            <a:ext cx="2688336" cy="530352"/>
+          </a:xfrm>
+          <a:prstGeom prst="rect">
+            <a:avLst/>
+          </a:prstGeom>
+          <a:noFill/>
+        </p:spPr>
+        <p:txBody>
+          <a:bodyPr wrap="square" anchor="ctr">
+            <a:noAutofit/>
+          </a:bodyPr>
+          <a:lstStyle/>
+          <a:p>
+            <a:r>
+              <a:rPr sz="1000" b="0">
+                <a:solidFill>
+                  <a:srgbClr val="53635B"/>
+                </a:solidFill>
+                <a:latin typeface="Aptos"/>
+              </a:rPr>
+              <a:t>When symptoms started</a:t>
+            </a:r>
+          </a:p>
+        </p:txBody>
+      </p:sp>
+      <p:sp>
+        <p:nvSpPr>
+          <p:cNvPr id="15" name="Rectangle 14"/>
+          <p:cNvSpPr/>
+          <p:nvPr/>
+        </p:nvSpPr>
+        <p:spPr>
+          <a:xfrm>
+            <a:off x="3383280" y="2340864"/>
+            <a:ext cx="2743200" cy="676656"/>
+          </a:xfrm>
+          <a:prstGeom prst="rect">
+            <a:avLst/>
+          </a:prstGeom>
+          <a:solidFill>
+            <a:srgbClr val="FFFFFF"/>
+          </a:solidFill>
+          <a:ln w="12700">
+            <a:solidFill>
+              <a:srgbClr val="B9C2BB"/>
+            </a:solidFill>
+          </a:ln>
+          <a:effectLst/>
+        </p:spPr>
+        <p:style>
+          <a:lnRef idx="1">
+            <a:schemeClr val="accent1"/>
+          </a:lnRef>
+          <a:fillRef idx="3">
+            <a:schemeClr val="accent1"/>
+          </a:fillRef>
+          <a:effectRef idx="2">
+            <a:schemeClr val="accent1"/>
+          </a:effectRef>
+          <a:fontRef idx="minor">
+            <a:schemeClr val="lt1"/>
+          </a:fontRef>
+        </p:style>
+        <p:txBody>
+          <a:bodyPr rtlCol="0" anchor="ctr"/>
+          <a:lstStyle/>
+          <a:p/>
+        </p:txBody>
+      </p:sp>
+      <p:sp>
+        <p:nvSpPr>
+          <p:cNvPr id="16" name="TextBox 15"/>
+          <p:cNvSpPr txBox="1"/>
+          <p:nvPr/>
+        </p:nvSpPr>
+        <p:spPr>
+          <a:xfrm>
+            <a:off x="3456432" y="2414016"/>
+            <a:ext cx="2596896" cy="530352"/>
+          </a:xfrm>
+          <a:prstGeom prst="rect">
+            <a:avLst/>
+          </a:prstGeom>
+          <a:noFill/>
+        </p:spPr>
+        <p:txBody>
+          <a:bodyPr wrap="square" anchor="ctr">
+            <a:noAutofit/>
+          </a:bodyPr>
+          <a:lstStyle/>
+          <a:p>
+            <a:r>
+              <a:rPr sz="1000" b="0">
+                <a:solidFill>
+                  <a:srgbClr val="53635B"/>
+                </a:solidFill>
+                <a:latin typeface="Aptos"/>
+              </a:rPr>
+              <a:t>Exact time</a:t>
+            </a:r>
+          </a:p>
+        </p:txBody>
+      </p:sp>
+      <p:sp>
+        <p:nvSpPr>
+          <p:cNvPr id="17" name="Rectangle 16"/>
+          <p:cNvSpPr/>
+          <p:nvPr/>
+        </p:nvSpPr>
+        <p:spPr>
+          <a:xfrm>
+            <a:off x="6126480" y="2340864"/>
+            <a:ext cx="2926080" cy="676656"/>
+          </a:xfrm>
+          <a:prstGeom prst="rect">
+            <a:avLst/>
+          </a:prstGeom>
+          <a:solidFill>
+            <a:srgbClr val="FFFFFF"/>
+          </a:solidFill>
+          <a:ln w="12700">
+            <a:solidFill>
+              <a:srgbClr val="B9C2BB"/>
+            </a:solidFill>
+          </a:ln>
+          <a:effectLst/>
+        </p:spPr>
+        <p:style>
+          <a:lnRef idx="1">
+            <a:schemeClr val="accent1"/>
+          </a:lnRef>
+          <a:fillRef idx="3">
+            <a:schemeClr val="accent1"/>
+          </a:fillRef>
+          <a:effectRef idx="2">
+            <a:schemeClr val="accent1"/>
+          </a:effectRef>
+          <a:fontRef idx="minor">
+            <a:schemeClr val="lt1"/>
+          </a:fontRef>
+        </p:style>
+        <p:txBody>
+          <a:bodyPr rtlCol="0" anchor="ctr"/>
+          <a:lstStyle/>
+          <a:p/>
+        </p:txBody>
+      </p:sp>
+      <p:sp>
+        <p:nvSpPr>
+          <p:cNvPr id="18" name="TextBox 17"/>
+          <p:cNvSpPr txBox="1"/>
+          <p:nvPr/>
+        </p:nvSpPr>
+        <p:spPr>
+          <a:xfrm>
+            <a:off x="6199632" y="2414016"/>
+            <a:ext cx="2779776" cy="530352"/>
+          </a:xfrm>
+          <a:prstGeom prst="rect">
+            <a:avLst/>
+          </a:prstGeom>
+          <a:noFill/>
+        </p:spPr>
+        <p:txBody>
+          <a:bodyPr wrap="square" anchor="ctr">
+            <a:noAutofit/>
+          </a:bodyPr>
+          <a:lstStyle/>
+          <a:p>
+            <a:r>
+              <a:rPr sz="1000" b="0">
+                <a:solidFill>
+                  <a:srgbClr val="53635B"/>
+                </a:solidFill>
+                <a:latin typeface="Aptos"/>
+              </a:rPr>
+              <a:t>Rounded to the hour</a:t>
+            </a:r>
+          </a:p>
+        </p:txBody>
+      </p:sp>
+      <p:sp>
+        <p:nvSpPr>
+          <p:cNvPr id="19" name="Rectangle 18"/>
+          <p:cNvSpPr/>
+          <p:nvPr/>
+        </p:nvSpPr>
+        <p:spPr>
+          <a:xfrm>
+            <a:off x="9052560" y="2340864"/>
+            <a:ext cx="3017520" cy="676656"/>
+          </a:xfrm>
+          <a:prstGeom prst="rect">
+            <a:avLst/>
+          </a:prstGeom>
+          <a:solidFill>
+            <a:srgbClr val="FFFFFF"/>
+          </a:solidFill>
+          <a:ln w="12700">
+            <a:solidFill>
+              <a:srgbClr val="B9C2BB"/>
+            </a:solidFill>
+          </a:ln>
+          <a:effectLst/>
+        </p:spPr>
+        <p:style>
+          <a:lnRef idx="1">
+            <a:schemeClr val="accent1"/>
+          </a:lnRef>
+          <a:fillRef idx="3">
+            <a:schemeClr val="accent1"/>
+          </a:fillRef>
+          <a:effectRef idx="2">
+            <a:schemeClr val="accent1"/>
+          </a:effectRef>
+          <a:fontRef idx="minor">
+            <a:schemeClr val="lt1"/>
+          </a:fontRef>
+        </p:style>
+        <p:txBody>
+          <a:bodyPr rtlCol="0" anchor="ctr"/>
+          <a:lstStyle/>
+          <a:p/>
+        </p:txBody>
+      </p:sp>
+      <p:sp>
+        <p:nvSpPr>
+          <p:cNvPr id="20" name="TextBox 19"/>
+          <p:cNvSpPr txBox="1"/>
+          <p:nvPr/>
+        </p:nvSpPr>
+        <p:spPr>
+          <a:xfrm>
+            <a:off x="9125712" y="2414016"/>
+            <a:ext cx="2871215" cy="530352"/>
+          </a:xfrm>
+          <a:prstGeom prst="rect">
+            <a:avLst/>
+          </a:prstGeom>
+          <a:noFill/>
+        </p:spPr>
+        <p:txBody>
+          <a:bodyPr wrap="square" anchor="ctr">
+            <a:noAutofit/>
+          </a:bodyPr>
+          <a:lstStyle/>
+          <a:p>
+            <a:r>
+              <a:rPr sz="1000" b="0">
+                <a:solidFill>
+                  <a:srgbClr val="53635B"/>
+                </a:solidFill>
+                <a:latin typeface="Aptos"/>
+              </a:rPr>
+              <a:t>Time band only</a:t>
+            </a:r>
+          </a:p>
+        </p:txBody>
+      </p:sp>
+      <p:sp>
+        <p:nvSpPr>
+          <p:cNvPr id="21" name="Rectangle 20"/>
+          <p:cNvSpPr/>
+          <p:nvPr/>
+        </p:nvSpPr>
+        <p:spPr>
+          <a:xfrm>
+            <a:off x="548640" y="3017520"/>
+            <a:ext cx="2834640" cy="676656"/>
+          </a:xfrm>
+          <a:prstGeom prst="rect">
+            <a:avLst/>
+          </a:prstGeom>
+          <a:solidFill>
+            <a:srgbClr val="FFFFFF"/>
+          </a:solidFill>
+          <a:ln w="12700">
+            <a:solidFill>
+              <a:srgbClr val="B9C2BB"/>
+            </a:solidFill>
+          </a:ln>
+          <a:effectLst/>
+        </p:spPr>
+        <p:style>
+          <a:lnRef idx="1">
+            <a:schemeClr val="accent1"/>
+          </a:lnRef>
+          <a:fillRef idx="3">
+            <a:schemeClr val="accent1"/>
+          </a:fillRef>
+          <a:effectRef idx="2">
+            <a:schemeClr val="accent1"/>
+          </a:effectRef>
+          <a:fontRef idx="minor">
+            <a:schemeClr val="lt1"/>
+          </a:fontRef>
+        </p:style>
+        <p:txBody>
+          <a:bodyPr rtlCol="0" anchor="ctr"/>
+          <a:lstStyle/>
+          <a:p/>
+        </p:txBody>
+      </p:sp>
+      <p:sp>
+        <p:nvSpPr>
+          <p:cNvPr id="22" name="TextBox 21"/>
+          <p:cNvSpPr txBox="1"/>
+          <p:nvPr/>
+        </p:nvSpPr>
+        <p:spPr>
+          <a:xfrm>
+            <a:off x="621792" y="3090672"/>
+            <a:ext cx="2688336" cy="530352"/>
+          </a:xfrm>
+          <a:prstGeom prst="rect">
+            <a:avLst/>
+          </a:prstGeom>
+          <a:noFill/>
+        </p:spPr>
+        <p:txBody>
+          <a:bodyPr wrap="square" anchor="ctr">
+            <a:noAutofit/>
+          </a:bodyPr>
+          <a:lstStyle/>
+          <a:p>
+            <a:r>
+              <a:rPr sz="1000" b="0">
+                <a:solidFill>
+                  <a:srgbClr val="53635B"/>
+                </a:solidFill>
+                <a:latin typeface="Aptos"/>
+              </a:rPr>
+              <a:t>Brain scan image</a:t>
+            </a:r>
+          </a:p>
+        </p:txBody>
+      </p:sp>
+      <p:sp>
+        <p:nvSpPr>
+          <p:cNvPr id="23" name="Rectangle 22"/>
+          <p:cNvSpPr/>
+          <p:nvPr/>
+        </p:nvSpPr>
+        <p:spPr>
+          <a:xfrm>
+            <a:off x="3383280" y="3017520"/>
+            <a:ext cx="2743200" cy="676656"/>
+          </a:xfrm>
+          <a:prstGeom prst="rect">
+            <a:avLst/>
+          </a:prstGeom>
+          <a:solidFill>
+            <a:srgbClr val="FFFFFF"/>
+          </a:solidFill>
+          <a:ln w="12700">
+            <a:solidFill>
+              <a:srgbClr val="B9C2BB"/>
+            </a:solidFill>
+          </a:ln>
+          <a:effectLst/>
+        </p:spPr>
+        <p:style>
+          <a:lnRef idx="1">
+            <a:schemeClr val="accent1"/>
+          </a:lnRef>
+          <a:fillRef idx="3">
+            <a:schemeClr val="accent1"/>
+          </a:fillRef>
+          <a:effectRef idx="2">
+            <a:schemeClr val="accent1"/>
+          </a:effectRef>
+          <a:fontRef idx="minor">
+            <a:schemeClr val="lt1"/>
+          </a:fontRef>
+        </p:style>
+        <p:txBody>
+          <a:bodyPr rtlCol="0" anchor="ctr"/>
+          <a:lstStyle/>
+          <a:p/>
+        </p:txBody>
+      </p:sp>
+      <p:sp>
+        <p:nvSpPr>
+          <p:cNvPr id="24" name="TextBox 23"/>
+          <p:cNvSpPr txBox="1"/>
+          <p:nvPr/>
+        </p:nvSpPr>
+        <p:spPr>
+          <a:xfrm>
+            <a:off x="3456432" y="3090672"/>
+            <a:ext cx="2596896" cy="530352"/>
+          </a:xfrm>
+          <a:prstGeom prst="rect">
+            <a:avLst/>
+          </a:prstGeom>
+          <a:noFill/>
+        </p:spPr>
+        <p:txBody>
+          <a:bodyPr wrap="square" anchor="ctr">
+            <a:noAutofit/>
+          </a:bodyPr>
+          <a:lstStyle/>
+          <a:p>
+            <a:r>
+              <a:rPr sz="1000" b="0">
+                <a:solidFill>
+                  <a:srgbClr val="53635B"/>
+                </a:solidFill>
+                <a:latin typeface="Aptos"/>
+              </a:rPr>
+              <a:t>Full image</a:t>
+            </a:r>
+          </a:p>
+        </p:txBody>
+      </p:sp>
+      <p:sp>
+        <p:nvSpPr>
+          <p:cNvPr id="25" name="Rectangle 24"/>
+          <p:cNvSpPr/>
+          <p:nvPr/>
+        </p:nvSpPr>
+        <p:spPr>
+          <a:xfrm>
+            <a:off x="6126480" y="3017520"/>
+            <a:ext cx="2926080" cy="676656"/>
+          </a:xfrm>
+          <a:prstGeom prst="rect">
+            <a:avLst/>
+          </a:prstGeom>
+          <a:solidFill>
+            <a:srgbClr val="FFFFFF"/>
+          </a:solidFill>
+          <a:ln w="12700">
+            <a:solidFill>
+              <a:srgbClr val="B9C2BB"/>
+            </a:solidFill>
+          </a:ln>
+          <a:effectLst/>
+        </p:spPr>
+        <p:style>
+          <a:lnRef idx="1">
+            <a:schemeClr val="accent1"/>
+          </a:lnRef>
+          <a:fillRef idx="3">
+            <a:schemeClr val="accent1"/>
+          </a:fillRef>
+          <a:effectRef idx="2">
+            <a:schemeClr val="accent1"/>
+          </a:effectRef>
+          <a:fontRef idx="minor">
+            <a:schemeClr val="lt1"/>
+          </a:fontRef>
+        </p:style>
+        <p:txBody>
+          <a:bodyPr rtlCol="0" anchor="ctr"/>
+          <a:lstStyle/>
+          <a:p/>
+        </p:txBody>
+      </p:sp>
+      <p:sp>
+        <p:nvSpPr>
+          <p:cNvPr id="26" name="TextBox 25"/>
+          <p:cNvSpPr txBox="1"/>
+          <p:nvPr/>
+        </p:nvSpPr>
+        <p:spPr>
+          <a:xfrm>
+            <a:off x="6199632" y="3090672"/>
+            <a:ext cx="2779776" cy="530352"/>
+          </a:xfrm>
+          <a:prstGeom prst="rect">
+            <a:avLst/>
+          </a:prstGeom>
+          <a:noFill/>
+        </p:spPr>
+        <p:txBody>
+          <a:bodyPr wrap="square" anchor="ctr">
+            <a:noAutofit/>
+          </a:bodyPr>
+          <a:lstStyle/>
+          <a:p>
+            <a:r>
+              <a:rPr sz="1000" b="0">
+                <a:solidFill>
+                  <a:srgbClr val="53635B"/>
+                </a:solidFill>
+                <a:latin typeface="Aptos"/>
+              </a:rPr>
+              <a:t>Report text, not the image</a:t>
+            </a:r>
+          </a:p>
+        </p:txBody>
+      </p:sp>
+      <p:sp>
+        <p:nvSpPr>
+          <p:cNvPr id="27" name="Rectangle 26"/>
+          <p:cNvSpPr/>
+          <p:nvPr/>
+        </p:nvSpPr>
+        <p:spPr>
+          <a:xfrm>
+            <a:off x="9052560" y="3017520"/>
+            <a:ext cx="3017520" cy="676656"/>
+          </a:xfrm>
+          <a:prstGeom prst="rect">
+            <a:avLst/>
+          </a:prstGeom>
+          <a:solidFill>
+            <a:srgbClr val="FFFFFF"/>
+          </a:solidFill>
+          <a:ln w="12700">
+            <a:solidFill>
+              <a:srgbClr val="B9C2BB"/>
+            </a:solidFill>
+          </a:ln>
+          <a:effectLst/>
+        </p:spPr>
+        <p:style>
+          <a:lnRef idx="1">
+            <a:schemeClr val="accent1"/>
+          </a:lnRef>
+          <a:fillRef idx="3">
+            <a:schemeClr val="accent1"/>
+          </a:fillRef>
+          <a:effectRef idx="2">
+            <a:schemeClr val="accent1"/>
+          </a:effectRef>
+          <a:fontRef idx="minor">
+            <a:schemeClr val="lt1"/>
+          </a:fontRef>
+        </p:style>
+        <p:txBody>
+          <a:bodyPr rtlCol="0" anchor="ctr"/>
+          <a:lstStyle/>
+          <a:p/>
+        </p:txBody>
+      </p:sp>
+      <p:sp>
+        <p:nvSpPr>
+          <p:cNvPr id="28" name="TextBox 27"/>
+          <p:cNvSpPr txBox="1"/>
+          <p:nvPr/>
+        </p:nvSpPr>
+        <p:spPr>
+          <a:xfrm>
+            <a:off x="9125712" y="3090672"/>
+            <a:ext cx="2871215" cy="530352"/>
+          </a:xfrm>
+          <a:prstGeom prst="rect">
+            <a:avLst/>
+          </a:prstGeom>
+          <a:noFill/>
+        </p:spPr>
+        <p:txBody>
+          <a:bodyPr wrap="square" anchor="ctr">
+            <a:noAutofit/>
+          </a:bodyPr>
+          <a:lstStyle/>
+          <a:p>
+            <a:r>
+              <a:rPr sz="1000" b="0">
+                <a:solidFill>
+                  <a:srgbClr val="53635B"/>
+                </a:solidFill>
+                <a:latin typeface="Aptos"/>
+              </a:rPr>
+              <a:t>Not released</a:t>
+            </a:r>
+          </a:p>
+        </p:txBody>
+      </p:sp>
+      <p:sp>
+        <p:nvSpPr>
+          <p:cNvPr id="29" name="Rectangle 28"/>
+          <p:cNvSpPr/>
+          <p:nvPr/>
+        </p:nvSpPr>
+        <p:spPr>
+          <a:xfrm>
+            <a:off x="548640" y="3694176"/>
+            <a:ext cx="2834640" cy="676656"/>
+          </a:xfrm>
+          <a:prstGeom prst="rect">
+            <a:avLst/>
+          </a:prstGeom>
+          <a:solidFill>
+            <a:srgbClr val="FFFFFF"/>
+          </a:solidFill>
+          <a:ln w="12700">
+            <a:solidFill>
+              <a:srgbClr val="B9C2BB"/>
+            </a:solidFill>
+          </a:ln>
+          <a:effectLst/>
+        </p:spPr>
+        <p:style>
+          <a:lnRef idx="1">
+            <a:schemeClr val="accent1"/>
+          </a:lnRef>
+          <a:fillRef idx="3">
+            <a:schemeClr val="accent1"/>
+          </a:fillRef>
+          <a:effectRef idx="2">
+            <a:schemeClr val="accent1"/>
+          </a:effectRef>
+          <a:fontRef idx="minor">
+            <a:schemeClr val="lt1"/>
+          </a:fontRef>
+        </p:style>
+        <p:txBody>
+          <a:bodyPr rtlCol="0" anchor="ctr"/>
+          <a:lstStyle/>
+          <a:p/>
+        </p:txBody>
+      </p:sp>
+      <p:sp>
+        <p:nvSpPr>
+          <p:cNvPr id="30" name="TextBox 29"/>
+          <p:cNvSpPr txBox="1"/>
+          <p:nvPr/>
+        </p:nvSpPr>
+        <p:spPr>
+          <a:xfrm>
+            <a:off x="621792" y="3767328"/>
+            <a:ext cx="2688336" cy="530352"/>
+          </a:xfrm>
+          <a:prstGeom prst="rect">
+            <a:avLst/>
+          </a:prstGeom>
+          <a:noFill/>
+        </p:spPr>
+        <p:txBody>
+          <a:bodyPr wrap="square" anchor="ctr">
+            <a:noAutofit/>
+          </a:bodyPr>
+          <a:lstStyle/>
+          <a:p>
+            <a:r>
+              <a:rPr sz="1000" b="0">
+                <a:solidFill>
+                  <a:srgbClr val="53635B"/>
+                </a:solidFill>
+                <a:latin typeface="Aptos"/>
+              </a:rPr>
+              <a:t>Stroke severity score</a:t>
+            </a:r>
+          </a:p>
+        </p:txBody>
+      </p:sp>
+      <p:sp>
+        <p:nvSpPr>
+          <p:cNvPr id="31" name="Rectangle 30"/>
+          <p:cNvSpPr/>
+          <p:nvPr/>
+        </p:nvSpPr>
+        <p:spPr>
+          <a:xfrm>
+            <a:off x="3383280" y="3694176"/>
+            <a:ext cx="2743200" cy="676656"/>
+          </a:xfrm>
+          <a:prstGeom prst="rect">
+            <a:avLst/>
+          </a:prstGeom>
+          <a:solidFill>
+            <a:srgbClr val="FFFFFF"/>
+          </a:solidFill>
+          <a:ln w="12700">
+            <a:solidFill>
+              <a:srgbClr val="B9C2BB"/>
+            </a:solidFill>
+          </a:ln>
+          <a:effectLst/>
+        </p:spPr>
+        <p:style>
+          <a:lnRef idx="1">
+            <a:schemeClr val="accent1"/>
+          </a:lnRef>
+          <a:fillRef idx="3">
+            <a:schemeClr val="accent1"/>
+          </a:fillRef>
+          <a:effectRef idx="2">
+            <a:schemeClr val="accent1"/>
+          </a:effectRef>
+          <a:fontRef idx="minor">
+            <a:schemeClr val="lt1"/>
+          </a:fontRef>
+        </p:style>
+        <p:txBody>
+          <a:bodyPr rtlCol="0" anchor="ctr"/>
+          <a:lstStyle/>
+          <a:p/>
+        </p:txBody>
+      </p:sp>
+      <p:sp>
+        <p:nvSpPr>
+          <p:cNvPr id="32" name="TextBox 31"/>
+          <p:cNvSpPr txBox="1"/>
+          <p:nvPr/>
+        </p:nvSpPr>
+        <p:spPr>
+          <a:xfrm>
+            <a:off x="3456432" y="3767328"/>
+            <a:ext cx="2596896" cy="530352"/>
+          </a:xfrm>
+          <a:prstGeom prst="rect">
+            <a:avLst/>
+          </a:prstGeom>
+          <a:noFill/>
+        </p:spPr>
+        <p:txBody>
+          <a:bodyPr wrap="square" anchor="ctr">
+            <a:noAutofit/>
+          </a:bodyPr>
+          <a:lstStyle/>
+          <a:p>
+            <a:r>
+              <a:rPr sz="1000" b="0">
+                <a:solidFill>
+                  <a:srgbClr val="53635B"/>
+                </a:solidFill>
+                <a:latin typeface="Aptos"/>
+              </a:rPr>
+              <a:t>Exact score</a:t>
+            </a:r>
+          </a:p>
+        </p:txBody>
+      </p:sp>
+      <p:sp>
+        <p:nvSpPr>
+          <p:cNvPr id="33" name="Rectangle 32"/>
+          <p:cNvSpPr/>
+          <p:nvPr/>
+        </p:nvSpPr>
+        <p:spPr>
+          <a:xfrm>
+            <a:off x="6126480" y="3694176"/>
+            <a:ext cx="2926080" cy="676656"/>
+          </a:xfrm>
+          <a:prstGeom prst="rect">
+            <a:avLst/>
+          </a:prstGeom>
+          <a:solidFill>
+            <a:srgbClr val="FFFFFF"/>
+          </a:solidFill>
+          <a:ln w="12700">
+            <a:solidFill>
+              <a:srgbClr val="B9C2BB"/>
+            </a:solidFill>
+          </a:ln>
+          <a:effectLst/>
+        </p:spPr>
+        <p:style>
+          <a:lnRef idx="1">
+            <a:schemeClr val="accent1"/>
+          </a:lnRef>
+          <a:fillRef idx="3">
+            <a:schemeClr val="accent1"/>
+          </a:fillRef>
+          <a:effectRef idx="2">
+            <a:schemeClr val="accent1"/>
+          </a:effectRef>
+          <a:fontRef idx="minor">
+            <a:schemeClr val="lt1"/>
+          </a:fontRef>
+        </p:style>
+        <p:txBody>
+          <a:bodyPr rtlCol="0" anchor="ctr"/>
+          <a:lstStyle/>
+          <a:p/>
+        </p:txBody>
+      </p:sp>
+      <p:sp>
+        <p:nvSpPr>
+          <p:cNvPr id="34" name="TextBox 33"/>
+          <p:cNvSpPr txBox="1"/>
+          <p:nvPr/>
+        </p:nvSpPr>
+        <p:spPr>
+          <a:xfrm>
+            <a:off x="6199632" y="3767328"/>
+            <a:ext cx="2779776" cy="530352"/>
+          </a:xfrm>
+          <a:prstGeom prst="rect">
+            <a:avLst/>
+          </a:prstGeom>
+          <a:noFill/>
+        </p:spPr>
+        <p:txBody>
+          <a:bodyPr wrap="square" anchor="ctr">
+            <a:noAutofit/>
+          </a:bodyPr>
+          <a:lstStyle/>
+          <a:p>
+            <a:r>
+              <a:rPr sz="1000" b="0">
+                <a:solidFill>
+                  <a:srgbClr val="53635B"/>
+                </a:solidFill>
+                <a:latin typeface="Aptos"/>
+              </a:rPr>
+              <a:t>Grouped into bands</a:t>
+            </a:r>
+          </a:p>
+        </p:txBody>
+      </p:sp>
+      <p:sp>
+        <p:nvSpPr>
+          <p:cNvPr id="35" name="Rectangle 34"/>
+          <p:cNvSpPr/>
+          <p:nvPr/>
+        </p:nvSpPr>
+        <p:spPr>
+          <a:xfrm>
+            <a:off x="9052560" y="3694176"/>
+            <a:ext cx="3017520" cy="676656"/>
+          </a:xfrm>
+          <a:prstGeom prst="rect">
+            <a:avLst/>
+          </a:prstGeom>
+          <a:solidFill>
+            <a:srgbClr val="FFFFFF"/>
+          </a:solidFill>
+          <a:ln w="12700">
+            <a:solidFill>
+              <a:srgbClr val="B9C2BB"/>
+            </a:solidFill>
+          </a:ln>
+          <a:effectLst/>
+        </p:spPr>
+        <p:style>
+          <a:lnRef idx="1">
+            <a:schemeClr val="accent1"/>
+          </a:lnRef>
+          <a:fillRef idx="3">
+            <a:schemeClr val="accent1"/>
+          </a:fillRef>
+          <a:effectRef idx="2">
+            <a:schemeClr val="accent1"/>
+          </a:effectRef>
+          <a:fontRef idx="minor">
+            <a:schemeClr val="lt1"/>
+          </a:fontRef>
+        </p:style>
+        <p:txBody>
+          <a:bodyPr rtlCol="0" anchor="ctr"/>
+          <a:lstStyle/>
+          <a:p/>
+        </p:txBody>
+      </p:sp>
+      <p:sp>
+        <p:nvSpPr>
+          <p:cNvPr id="36" name="TextBox 35"/>
+          <p:cNvSpPr txBox="1"/>
+          <p:nvPr/>
+        </p:nvSpPr>
+        <p:spPr>
+          <a:xfrm>
+            <a:off x="9125712" y="3767328"/>
+            <a:ext cx="2871215" cy="530352"/>
+          </a:xfrm>
+          <a:prstGeom prst="rect">
+            <a:avLst/>
+          </a:prstGeom>
+          <a:noFill/>
+        </p:spPr>
+        <p:txBody>
+          <a:bodyPr wrap="square" anchor="ctr">
+            <a:noAutofit/>
+          </a:bodyPr>
+          <a:lstStyle/>
+          <a:p>
+            <a:r>
+              <a:rPr sz="1000" b="0">
+                <a:solidFill>
+                  <a:srgbClr val="53635B"/>
+                </a:solidFill>
+                <a:latin typeface="Aptos"/>
+              </a:rPr>
+              <a:t>Bands, small groups hidden</a:t>
+            </a:r>
+          </a:p>
+        </p:txBody>
+      </p:sp>
+      <p:sp>
+        <p:nvSpPr>
+          <p:cNvPr id="37" name="Rectangle 36"/>
+          <p:cNvSpPr/>
+          <p:nvPr/>
+        </p:nvSpPr>
+        <p:spPr>
+          <a:xfrm>
+            <a:off x="548640" y="4370832"/>
+            <a:ext cx="2834640" cy="676656"/>
+          </a:xfrm>
+          <a:prstGeom prst="rect">
+            <a:avLst/>
+          </a:prstGeom>
+          <a:solidFill>
+            <a:srgbClr val="FFFFFF"/>
+          </a:solidFill>
+          <a:ln w="12700">
+            <a:solidFill>
+              <a:srgbClr val="B9C2BB"/>
+            </a:solidFill>
+          </a:ln>
+          <a:effectLst/>
+        </p:spPr>
+        <p:style>
+          <a:lnRef idx="1">
+            <a:schemeClr val="accent1"/>
+          </a:lnRef>
+          <a:fillRef idx="3">
+            <a:schemeClr val="accent1"/>
+          </a:fillRef>
+          <a:effectRef idx="2">
+            <a:schemeClr val="accent1"/>
+          </a:effectRef>
+          <a:fontRef idx="minor">
+            <a:schemeClr val="lt1"/>
+          </a:fontRef>
+        </p:style>
+        <p:txBody>
+          <a:bodyPr rtlCol="0" anchor="ctr"/>
+          <a:lstStyle/>
+          <a:p/>
+        </p:txBody>
+      </p:sp>
+      <p:sp>
+        <p:nvSpPr>
+          <p:cNvPr id="38" name="TextBox 37"/>
+          <p:cNvSpPr txBox="1"/>
+          <p:nvPr/>
+        </p:nvSpPr>
+        <p:spPr>
+          <a:xfrm>
+            <a:off x="621792" y="4443984"/>
+            <a:ext cx="2688336" cy="530352"/>
+          </a:xfrm>
+          <a:prstGeom prst="rect">
+            <a:avLst/>
+          </a:prstGeom>
+          <a:noFill/>
+        </p:spPr>
+        <p:txBody>
+          <a:bodyPr wrap="square" anchor="ctr">
+            <a:noAutofit/>
+          </a:bodyPr>
+          <a:lstStyle/>
+          <a:p>
+            <a:r>
+              <a:rPr sz="1000" b="0">
+                <a:solidFill>
+                  <a:srgbClr val="53635B"/>
+                </a:solidFill>
+                <a:latin typeface="Aptos"/>
+              </a:rPr>
+              <a:t>Final diagnosis</a:t>
+            </a:r>
+          </a:p>
+        </p:txBody>
+      </p:sp>
+      <p:sp>
+        <p:nvSpPr>
+          <p:cNvPr id="39" name="Rectangle 38"/>
+          <p:cNvSpPr/>
+          <p:nvPr/>
+        </p:nvSpPr>
+        <p:spPr>
+          <a:xfrm>
+            <a:off x="3383280" y="4370832"/>
+            <a:ext cx="2743200" cy="676656"/>
+          </a:xfrm>
+          <a:prstGeom prst="rect">
+            <a:avLst/>
+          </a:prstGeom>
+          <a:solidFill>
+            <a:srgbClr val="FFFFFF"/>
+          </a:solidFill>
+          <a:ln w="12700">
+            <a:solidFill>
+              <a:srgbClr val="B9C2BB"/>
+            </a:solidFill>
+          </a:ln>
+          <a:effectLst/>
+        </p:spPr>
+        <p:style>
+          <a:lnRef idx="1">
+            <a:schemeClr val="accent1"/>
+          </a:lnRef>
+          <a:fillRef idx="3">
+            <a:schemeClr val="accent1"/>
+          </a:fillRef>
+          <a:effectRef idx="2">
+            <a:schemeClr val="accent1"/>
+          </a:effectRef>
+          <a:fontRef idx="minor">
+            <a:schemeClr val="lt1"/>
+          </a:fontRef>
+        </p:style>
+        <p:txBody>
+          <a:bodyPr rtlCol="0" anchor="ctr"/>
+          <a:lstStyle/>
+          <a:p/>
+        </p:txBody>
+      </p:sp>
+      <p:sp>
+        <p:nvSpPr>
+          <p:cNvPr id="40" name="TextBox 39"/>
+          <p:cNvSpPr txBox="1"/>
+          <p:nvPr/>
+        </p:nvSpPr>
+        <p:spPr>
+          <a:xfrm>
+            <a:off x="3456432" y="4443984"/>
+            <a:ext cx="2596896" cy="530352"/>
+          </a:xfrm>
+          <a:prstGeom prst="rect">
+            <a:avLst/>
+          </a:prstGeom>
+          <a:noFill/>
+        </p:spPr>
+        <p:txBody>
+          <a:bodyPr wrap="square" anchor="ctr">
+            <a:noAutofit/>
+          </a:bodyPr>
+          <a:lstStyle/>
+          <a:p>
+            <a:r>
+              <a:rPr sz="1000" b="0">
+                <a:solidFill>
+                  <a:srgbClr val="53635B"/>
+                </a:solidFill>
+                <a:latin typeface="Aptos"/>
+              </a:rPr>
+              <a:t>Full detail</a:t>
+            </a:r>
+          </a:p>
+        </p:txBody>
+      </p:sp>
+      <p:sp>
+        <p:nvSpPr>
+          <p:cNvPr id="41" name="Rectangle 40"/>
+          <p:cNvSpPr/>
+          <p:nvPr/>
+        </p:nvSpPr>
+        <p:spPr>
+          <a:xfrm>
+            <a:off x="6126480" y="4370832"/>
+            <a:ext cx="2926080" cy="676656"/>
+          </a:xfrm>
+          <a:prstGeom prst="rect">
+            <a:avLst/>
+          </a:prstGeom>
+          <a:solidFill>
+            <a:srgbClr val="FFFFFF"/>
+          </a:solidFill>
+          <a:ln w="12700">
+            <a:solidFill>
+              <a:srgbClr val="B9C2BB"/>
+            </a:solidFill>
+          </a:ln>
+          <a:effectLst/>
+        </p:spPr>
+        <p:style>
+          <a:lnRef idx="1">
+            <a:schemeClr val="accent1"/>
+          </a:lnRef>
+          <a:fillRef idx="3">
+            <a:schemeClr val="accent1"/>
+          </a:fillRef>
+          <a:effectRef idx="2">
+            <a:schemeClr val="accent1"/>
+          </a:effectRef>
+          <a:fontRef idx="minor">
+            <a:schemeClr val="lt1"/>
+          </a:fontRef>
+        </p:style>
+        <p:txBody>
+          <a:bodyPr rtlCol="0" anchor="ctr"/>
+          <a:lstStyle/>
+          <a:p/>
+        </p:txBody>
+      </p:sp>
+      <p:sp>
+        <p:nvSpPr>
+          <p:cNvPr id="42" name="TextBox 41"/>
+          <p:cNvSpPr txBox="1"/>
+          <p:nvPr/>
+        </p:nvSpPr>
+        <p:spPr>
+          <a:xfrm>
+            <a:off x="6199632" y="4443984"/>
+            <a:ext cx="2779776" cy="530352"/>
+          </a:xfrm>
+          <a:prstGeom prst="rect">
+            <a:avLst/>
+          </a:prstGeom>
+          <a:noFill/>
+        </p:spPr>
+        <p:txBody>
+          <a:bodyPr wrap="square" anchor="ctr">
+            <a:noAutofit/>
+          </a:bodyPr>
+          <a:lstStyle/>
+          <a:p>
+            <a:r>
+              <a:rPr sz="1000" b="0">
+                <a:solidFill>
+                  <a:srgbClr val="53635B"/>
+                </a:solidFill>
+                <a:latin typeface="Aptos"/>
+              </a:rPr>
+              <a:t>Grouped category</a:t>
+            </a:r>
+          </a:p>
+        </p:txBody>
+      </p:sp>
+      <p:sp>
+        <p:nvSpPr>
+          <p:cNvPr id="43" name="Rectangle 42"/>
+          <p:cNvSpPr/>
+          <p:nvPr/>
+        </p:nvSpPr>
+        <p:spPr>
+          <a:xfrm>
+            <a:off x="9052560" y="4370832"/>
+            <a:ext cx="3017520" cy="676656"/>
+          </a:xfrm>
+          <a:prstGeom prst="rect">
+            <a:avLst/>
+          </a:prstGeom>
+          <a:solidFill>
+            <a:srgbClr val="FFFFFF"/>
+          </a:solidFill>
+          <a:ln w="12700">
+            <a:solidFill>
+              <a:srgbClr val="B9C2BB"/>
+            </a:solidFill>
+          </a:ln>
+          <a:effectLst/>
+        </p:spPr>
+        <p:style>
+          <a:lnRef idx="1">
+            <a:schemeClr val="accent1"/>
+          </a:lnRef>
+          <a:fillRef idx="3">
+            <a:schemeClr val="accent1"/>
+          </a:fillRef>
+          <a:effectRef idx="2">
+            <a:schemeClr val="accent1"/>
+          </a:effectRef>
+          <a:fontRef idx="minor">
+            <a:schemeClr val="lt1"/>
+          </a:fontRef>
+        </p:style>
+        <p:txBody>
+          <a:bodyPr rtlCol="0" anchor="ctr"/>
+          <a:lstStyle/>
+          <a:p/>
+        </p:txBody>
+      </p:sp>
+      <p:sp>
+        <p:nvSpPr>
+          <p:cNvPr id="44" name="TextBox 43"/>
+          <p:cNvSpPr txBox="1"/>
+          <p:nvPr/>
+        </p:nvSpPr>
+        <p:spPr>
+          <a:xfrm>
+            <a:off x="9125712" y="4443984"/>
+            <a:ext cx="2871215" cy="530352"/>
+          </a:xfrm>
+          <a:prstGeom prst="rect">
+            <a:avLst/>
+          </a:prstGeom>
+          <a:noFill/>
+        </p:spPr>
+        <p:txBody>
+          <a:bodyPr wrap="square" anchor="ctr">
+            <a:noAutofit/>
+          </a:bodyPr>
+          <a:lstStyle/>
+          <a:p>
+            <a:r>
+              <a:rPr sz="1000" b="0">
+                <a:solidFill>
+                  <a:srgbClr val="53635B"/>
+                </a:solidFill>
+                <a:latin typeface="Aptos"/>
+              </a:rPr>
+              <a:t>Counts only, minimum group size</a:t>
+            </a:r>
+          </a:p>
+        </p:txBody>
+      </p:sp>
+      <p:sp>
+        <p:nvSpPr>
+          <p:cNvPr id="45" name="TextBox 44"/>
+          <p:cNvSpPr txBox="1"/>
+          <p:nvPr/>
+        </p:nvSpPr>
+        <p:spPr>
+          <a:xfrm>
+            <a:off x="914400" y="5138928"/>
+            <a:ext cx="9875520" cy="457200"/>
+          </a:xfrm>
+          <a:prstGeom prst="rect">
+            <a:avLst/>
+          </a:prstGeom>
+          <a:noFill/>
+        </p:spPr>
+        <p:txBody>
+          <a:bodyPr wrap="square">
+            <a:noAutofit/>
+          </a:bodyPr>
+          <a:lstStyle/>
+          <a:p>
+            <a:r>
+              <a:rPr sz="1200" b="1">
+                <a:solidFill>
+                  <a:srgbClr val="15201B"/>
+                </a:solidFill>
+                <a:latin typeface="Aptos"/>
+              </a:rPr>
+              <a:t>None of this is an if-statement inside the application. The row is looked up from the three dials.</a:t>
+            </a:r>
+          </a:p>
+        </p:txBody>
+      </p:sp>
+      <p:sp>
+        <p:nvSpPr>
+          <p:cNvPr id="46" name="TextBox 45"/>
+          <p:cNvSpPr txBox="1"/>
+          <p:nvPr/>
+        </p:nvSpPr>
+        <p:spPr>
+          <a:xfrm>
+            <a:off x="566928" y="6355080"/>
+            <a:ext cx="5669280" cy="274320"/>
+          </a:xfrm>
+          <a:prstGeom prst="rect">
+            <a:avLst/>
+          </a:prstGeom>
+          <a:noFill/>
+        </p:spPr>
+        <p:txBody>
+          <a:bodyPr wrap="square">
+            <a:noAutofit/>
+          </a:bodyPr>
+          <a:lstStyle/>
+          <a:p>
+            <a:r>
+              <a:rPr sz="800" b="0">
+                <a:solidFill>
+                  <a:srgbClr val="53635B"/>
+                </a:solidFill>
+                <a:latin typeface="Aptos"/>
+              </a:rPr>
+              <a:t>Stroke fields under the three dials / 23</a:t>
+            </a:r>
+          </a:p>
+        </p:txBody>
+      </p:sp>
+    </p:spTree>
+  </p:cSld>
+  <p:clrMapOvr>
+    <a:masterClrMapping/>
+  </p:clrMapOvr>
+</p:sld>
+</file>
+
+<file path=ppt/slides/slide39.xml><?xml version="1.0" encoding="utf-8"?>
+<p:sld xmlns:a="http://schemas.openxmlformats.org/drawingml/2006/main" xmlns:p="http://schemas.openxmlformats.org/presentationml/2006/main" xmlns:r="http://schemas.openxmlformats.org/officeDocument/2006/relationships">
+  <p:cSld>
+    <p:bg>
+      <p:bgPr>
+        <a:solidFill>
+          <a:srgbClr val="F7F3EA"/>
+        </a:solidFill>
+        <a:effectLst/>
+      </p:bgPr>
+    </p:bg>
+    <p:spTree>
+      <p:nvGrpSpPr>
+        <p:cNvPr id="1" name=""/>
+        <p:cNvGrpSpPr/>
+        <p:nvPr/>
+      </p:nvGrpSpPr>
+      <p:grpSpPr/>
+      <p:sp>
+        <p:nvSpPr>
+          <p:cNvPr id="2" name="TextBox 1"/>
+          <p:cNvSpPr txBox="1"/>
+          <p:nvPr/>
+        </p:nvSpPr>
+        <p:spPr>
+          <a:xfrm>
+            <a:off x="548640" y="320040"/>
+            <a:ext cx="2377440" cy="292608"/>
+          </a:xfrm>
+          <a:prstGeom prst="rect">
+            <a:avLst/>
+          </a:prstGeom>
+          <a:noFill/>
+        </p:spPr>
+        <p:txBody>
+          <a:bodyPr wrap="square">
+            <a:noAutofit/>
+          </a:bodyPr>
+          <a:lstStyle/>
+          <a:p>
+            <a:r>
+              <a:rPr sz="1300" b="1">
+                <a:solidFill>
+                  <a:srgbClr val="53635B"/>
+                </a:solidFill>
+                <a:latin typeface="Aptos"/>
+              </a:rPr>
+              <a:t>GRAILS + DAGENTS</a:t>
+            </a:r>
+          </a:p>
+        </p:txBody>
+      </p:sp>
+      <p:sp>
+        <p:nvSpPr>
+          <p:cNvPr id="3" name="TextBox 2"/>
+          <p:cNvSpPr txBox="1"/>
+          <p:nvPr/>
+        </p:nvSpPr>
+        <p:spPr>
+          <a:xfrm>
+            <a:off x="548640" y="658368"/>
+            <a:ext cx="10424160" cy="594360"/>
+          </a:xfrm>
+          <a:prstGeom prst="rect">
+            <a:avLst/>
+          </a:prstGeom>
+          <a:noFill/>
+        </p:spPr>
+        <p:txBody>
+          <a:bodyPr wrap="square">
+            <a:noAutofit/>
+          </a:bodyPr>
+          <a:lstStyle/>
+          <a:p>
+            <a:r>
+              <a:rPr sz="2900" b="1">
+                <a:solidFill>
+                  <a:srgbClr val="15201B"/>
+                </a:solidFill>
+                <a:latin typeface="Aptos"/>
+              </a:rPr>
+              <a:t>GRAILS splits the same way Dagents already splits.</a:t>
+            </a:r>
+          </a:p>
+        </p:txBody>
+      </p:sp>
+      <p:sp>
+        <p:nvSpPr>
+          <p:cNvPr id="4" name="TextBox 3"/>
+          <p:cNvSpPr txBox="1"/>
+          <p:nvPr/>
+        </p:nvSpPr>
+        <p:spPr>
+          <a:xfrm>
+            <a:off x="566928" y="1225296"/>
+            <a:ext cx="9784080" cy="521207"/>
+          </a:xfrm>
+          <a:prstGeom prst="rect">
+            <a:avLst/>
+          </a:prstGeom>
+          <a:noFill/>
+        </p:spPr>
+        <p:txBody>
+          <a:bodyPr wrap="square">
+            <a:noAutofit/>
+          </a:bodyPr>
+          <a:lstStyle/>
+          <a:p>
+            <a:r>
+              <a:rPr sz="1400" b="0">
+                <a:solidFill>
+                  <a:srgbClr val="53635B"/>
+                </a:solidFill>
+                <a:latin typeface="Aptos"/>
+              </a:rPr>
+              <a:t>The Rails are planning. The Guard is runtime. That line is the one Dagents is built on.</a:t>
+            </a:r>
+          </a:p>
+        </p:txBody>
+      </p:sp>
+      <p:sp>
+        <p:nvSpPr>
+          <p:cNvPr id="5" name="Rounded Rectangle 4"/>
+          <p:cNvSpPr/>
+          <p:nvPr/>
+        </p:nvSpPr>
+        <p:spPr>
+          <a:xfrm>
+            <a:off x="777240" y="1691640"/>
+            <a:ext cx="4892040" cy="1463040"/>
+          </a:xfrm>
+          <a:prstGeom prst="roundRect">
+            <a:avLst/>
+          </a:prstGeom>
+          <a:solidFill>
+            <a:srgbClr val="E9E1FA"/>
+          </a:solidFill>
+          <a:ln w="12700">
+            <a:solidFill>
+              <a:srgbClr val="B9C2BB"/>
+            </a:solidFill>
+          </a:ln>
+          <a:effectLst/>
+        </p:spPr>
+        <p:style>
+          <a:lnRef idx="1">
+            <a:schemeClr val="accent1"/>
+          </a:lnRef>
+          <a:fillRef idx="3">
+            <a:schemeClr val="accent1"/>
+          </a:fillRef>
+          <a:effectRef idx="2">
+            <a:schemeClr val="accent1"/>
+          </a:effectRef>
+          <a:fontRef idx="minor">
+            <a:schemeClr val="lt1"/>
+          </a:fontRef>
+        </p:style>
+        <p:txBody>
+          <a:bodyPr rtlCol="0" anchor="ctr"/>
+          <a:lstStyle/>
+          <a:p/>
+        </p:txBody>
+      </p:sp>
+      <p:sp>
+        <p:nvSpPr>
+          <p:cNvPr id="6" name="TextBox 5"/>
+          <p:cNvSpPr txBox="1"/>
+          <p:nvPr/>
+        </p:nvSpPr>
+        <p:spPr>
+          <a:xfrm>
+            <a:off x="941832" y="1837944"/>
+            <a:ext cx="4572000" cy="320040"/>
+          </a:xfrm>
+          <a:prstGeom prst="rect">
+            <a:avLst/>
+          </a:prstGeom>
+          <a:noFill/>
+        </p:spPr>
+        <p:txBody>
+          <a:bodyPr wrap="square">
+            <a:noAutofit/>
+          </a:bodyPr>
+          <a:lstStyle/>
+          <a:p>
+            <a:r>
+              <a:rPr sz="1500" b="1">
+                <a:solidFill>
+                  <a:srgbClr val="15201B"/>
+                </a:solidFill>
+                <a:latin typeface="Aptos"/>
+              </a:rPr>
+              <a:t>Rails = planning</a:t>
+            </a:r>
+          </a:p>
+        </p:txBody>
+      </p:sp>
+      <p:sp>
+        <p:nvSpPr>
+          <p:cNvPr id="7" name="TextBox 6"/>
+          <p:cNvSpPr txBox="1"/>
+          <p:nvPr/>
+        </p:nvSpPr>
+        <p:spPr>
+          <a:xfrm>
+            <a:off x="941832" y="2221992"/>
+            <a:ext cx="4572000" cy="804672"/>
+          </a:xfrm>
+          <a:prstGeom prst="rect">
+            <a:avLst/>
+          </a:prstGeom>
+          <a:noFill/>
+        </p:spPr>
+        <p:txBody>
+          <a:bodyPr wrap="square">
+            <a:noAutofit/>
+          </a:bodyPr>
+          <a:lstStyle/>
+          <a:p>
+            <a:r>
+              <a:rPr sz="1200" b="0">
+                <a:solidFill>
+                  <a:srgbClr val="53635B"/>
+                </a:solidFill>
+                <a:latin typeface="Aptos"/>
+              </a:rPr>
+              <a:t>Work out the protection plan. Pure, typed, repeatable, and no input or output. This belongs in the OCaml layer, beside the dataset and model planners.</a:t>
+            </a:r>
+          </a:p>
+        </p:txBody>
+      </p:sp>
+      <p:sp>
+        <p:nvSpPr>
+          <p:cNvPr id="8" name="Rounded Rectangle 7"/>
+          <p:cNvSpPr/>
+          <p:nvPr/>
+        </p:nvSpPr>
+        <p:spPr>
+          <a:xfrm>
+            <a:off x="6217920" y="1691640"/>
+            <a:ext cx="4892040" cy="1463040"/>
+          </a:xfrm>
+          <a:prstGeom prst="roundRect">
+            <a:avLst/>
+          </a:prstGeom>
+          <a:solidFill>
+            <a:srgbClr val="DCE7F1"/>
+          </a:solidFill>
+          <a:ln w="12700">
+            <a:solidFill>
+              <a:srgbClr val="B9C2BB"/>
+            </a:solidFill>
+          </a:ln>
+          <a:effectLst/>
+        </p:spPr>
+        <p:style>
+          <a:lnRef idx="1">
+            <a:schemeClr val="accent1"/>
+          </a:lnRef>
+          <a:fillRef idx="3">
+            <a:schemeClr val="accent1"/>
+          </a:fillRef>
+          <a:effectRef idx="2">
+            <a:schemeClr val="accent1"/>
+          </a:effectRef>
+          <a:fontRef idx="minor">
+            <a:schemeClr val="lt1"/>
+          </a:fontRef>
+        </p:style>
+        <p:txBody>
+          <a:bodyPr rtlCol="0" anchor="ctr"/>
+          <a:lstStyle/>
+          <a:p/>
+        </p:txBody>
+      </p:sp>
+      <p:sp>
+        <p:nvSpPr>
+          <p:cNvPr id="9" name="TextBox 8"/>
+          <p:cNvSpPr txBox="1"/>
+          <p:nvPr/>
+        </p:nvSpPr>
+        <p:spPr>
+          <a:xfrm>
+            <a:off x="6382512" y="1837944"/>
+            <a:ext cx="4572000" cy="320040"/>
+          </a:xfrm>
+          <a:prstGeom prst="rect">
+            <a:avLst/>
+          </a:prstGeom>
+          <a:noFill/>
+        </p:spPr>
+        <p:txBody>
+          <a:bodyPr wrap="square">
+            <a:noAutofit/>
+          </a:bodyPr>
+          <a:lstStyle/>
+          <a:p>
+            <a:r>
+              <a:rPr sz="1500" b="1">
+                <a:solidFill>
+                  <a:srgbClr val="15201B"/>
+                </a:solidFill>
+                <a:latin typeface="Aptos"/>
+              </a:rPr>
+              <a:t>Guard = runtime</a:t>
+            </a:r>
+          </a:p>
+        </p:txBody>
+      </p:sp>
+      <p:sp>
+        <p:nvSpPr>
+          <p:cNvPr id="10" name="TextBox 9"/>
+          <p:cNvSpPr txBox="1"/>
+          <p:nvPr/>
+        </p:nvSpPr>
+        <p:spPr>
+          <a:xfrm>
+            <a:off x="6382512" y="2221992"/>
+            <a:ext cx="4572000" cy="804672"/>
+          </a:xfrm>
+          <a:prstGeom prst="rect">
+            <a:avLst/>
+          </a:prstGeom>
+          <a:noFill/>
+        </p:spPr>
+        <p:txBody>
+          <a:bodyPr wrap="square">
+            <a:noAutofit/>
+          </a:bodyPr>
+          <a:lstStyle/>
+          <a:p>
+            <a:r>
+              <a:rPr sz="1200" b="0">
+                <a:solidFill>
+                  <a:srgbClr val="53635B"/>
+                </a:solidFill>
+                <a:latin typeface="Aptos"/>
+              </a:rPr>
+              <a:t>Apply the plan to real data and record what was decided. This belongs in the LMA and GMA, where the side effects already are.</a:t>
+            </a:r>
+          </a:p>
+        </p:txBody>
+      </p:sp>
+      <p:sp>
+        <p:nvSpPr>
+          <p:cNvPr id="11" name="Rectangle 10"/>
+          <p:cNvSpPr/>
+          <p:nvPr/>
+        </p:nvSpPr>
+        <p:spPr>
+          <a:xfrm>
+            <a:off x="548640" y="3310128"/>
+            <a:ext cx="2560320" cy="658368"/>
+          </a:xfrm>
+          <a:prstGeom prst="rect">
+            <a:avLst/>
+          </a:prstGeom>
+          <a:solidFill>
+            <a:srgbClr val="F4E8D0"/>
+          </a:solidFill>
+          <a:ln w="12700">
+            <a:solidFill>
+              <a:srgbClr val="B9C2BB"/>
+            </a:solidFill>
+          </a:ln>
+          <a:effectLst/>
+        </p:spPr>
+        <p:style>
+          <a:lnRef idx="1">
+            <a:schemeClr val="accent1"/>
+          </a:lnRef>
+          <a:fillRef idx="3">
+            <a:schemeClr val="accent1"/>
+          </a:fillRef>
+          <a:effectRef idx="2">
+            <a:schemeClr val="accent1"/>
+          </a:effectRef>
+          <a:fontRef idx="minor">
+            <a:schemeClr val="lt1"/>
+          </a:fontRef>
+        </p:style>
+        <p:txBody>
+          <a:bodyPr rtlCol="0" anchor="ctr"/>
+          <a:lstStyle/>
+          <a:p/>
+        </p:txBody>
+      </p:sp>
+      <p:sp>
+        <p:nvSpPr>
+          <p:cNvPr id="12" name="TextBox 11"/>
+          <p:cNvSpPr txBox="1"/>
+          <p:nvPr/>
+        </p:nvSpPr>
+        <p:spPr>
+          <a:xfrm>
+            <a:off x="621792" y="3383280"/>
+            <a:ext cx="2414015" cy="512063"/>
+          </a:xfrm>
+          <a:prstGeom prst="rect">
+            <a:avLst/>
+          </a:prstGeom>
+          <a:noFill/>
+        </p:spPr>
+        <p:txBody>
+          <a:bodyPr wrap="square" anchor="ctr">
+            <a:noAutofit/>
+          </a:bodyPr>
+          <a:lstStyle/>
+          <a:p>
+            <a:r>
+              <a:rPr sz="1100" b="1">
+                <a:solidFill>
+                  <a:srgbClr val="15201B"/>
+                </a:solidFill>
+                <a:latin typeface="Aptos"/>
+              </a:rPr>
+              <a:t>GRAILS part</a:t>
+            </a:r>
+          </a:p>
+        </p:txBody>
+      </p:sp>
+      <p:sp>
+        <p:nvSpPr>
+          <p:cNvPr id="13" name="Rectangle 12"/>
+          <p:cNvSpPr/>
+          <p:nvPr/>
+        </p:nvSpPr>
+        <p:spPr>
+          <a:xfrm>
+            <a:off x="3108960" y="3310128"/>
+            <a:ext cx="3108960" cy="658368"/>
+          </a:xfrm>
+          <a:prstGeom prst="rect">
+            <a:avLst/>
+          </a:prstGeom>
+          <a:solidFill>
+            <a:srgbClr val="F4E8D0"/>
+          </a:solidFill>
+          <a:ln w="12700">
+            <a:solidFill>
+              <a:srgbClr val="B9C2BB"/>
+            </a:solidFill>
+          </a:ln>
+          <a:effectLst/>
+        </p:spPr>
+        <p:style>
+          <a:lnRef idx="1">
+            <a:schemeClr val="accent1"/>
+          </a:lnRef>
+          <a:fillRef idx="3">
+            <a:schemeClr val="accent1"/>
+          </a:fillRef>
+          <a:effectRef idx="2">
+            <a:schemeClr val="accent1"/>
+          </a:effectRef>
+          <a:fontRef idx="minor">
+            <a:schemeClr val="lt1"/>
+          </a:fontRef>
+        </p:style>
+        <p:txBody>
+          <a:bodyPr rtlCol="0" anchor="ctr"/>
+          <a:lstStyle/>
+          <a:p/>
+        </p:txBody>
+      </p:sp>
+      <p:sp>
+        <p:nvSpPr>
+          <p:cNvPr id="14" name="TextBox 13"/>
+          <p:cNvSpPr txBox="1"/>
+          <p:nvPr/>
+        </p:nvSpPr>
+        <p:spPr>
+          <a:xfrm>
+            <a:off x="3182112" y="3383280"/>
+            <a:ext cx="2962656" cy="512063"/>
+          </a:xfrm>
+          <a:prstGeom prst="rect">
+            <a:avLst/>
+          </a:prstGeom>
+          <a:noFill/>
+        </p:spPr>
+        <p:txBody>
+          <a:bodyPr wrap="square" anchor="ctr">
+            <a:noAutofit/>
+          </a:bodyPr>
+          <a:lstStyle/>
+          <a:p>
+            <a:r>
+              <a:rPr sz="1100" b="1">
+                <a:solidFill>
+                  <a:srgbClr val="15201B"/>
+                </a:solidFill>
+                <a:latin typeface="Aptos"/>
+              </a:rPr>
+              <a:t>Where it goes in Dagents</a:t>
+            </a:r>
+          </a:p>
+        </p:txBody>
+      </p:sp>
+      <p:sp>
+        <p:nvSpPr>
+          <p:cNvPr id="15" name="Rectangle 14"/>
+          <p:cNvSpPr/>
+          <p:nvPr/>
+        </p:nvSpPr>
+        <p:spPr>
+          <a:xfrm>
+            <a:off x="6217920" y="3310128"/>
+            <a:ext cx="5303520" cy="658368"/>
+          </a:xfrm>
+          <a:prstGeom prst="rect">
+            <a:avLst/>
+          </a:prstGeom>
+          <a:solidFill>
+            <a:srgbClr val="F4E8D0"/>
+          </a:solidFill>
+          <a:ln w="12700">
+            <a:solidFill>
+              <a:srgbClr val="B9C2BB"/>
+            </a:solidFill>
+          </a:ln>
+          <a:effectLst/>
+        </p:spPr>
+        <p:style>
+          <a:lnRef idx="1">
+            <a:schemeClr val="accent1"/>
+          </a:lnRef>
+          <a:fillRef idx="3">
+            <a:schemeClr val="accent1"/>
+          </a:fillRef>
+          <a:effectRef idx="2">
+            <a:schemeClr val="accent1"/>
+          </a:effectRef>
+          <a:fontRef idx="minor">
+            <a:schemeClr val="lt1"/>
+          </a:fontRef>
+        </p:style>
+        <p:txBody>
+          <a:bodyPr rtlCol="0" anchor="ctr"/>
+          <a:lstStyle/>
+          <a:p/>
+        </p:txBody>
+      </p:sp>
+      <p:sp>
+        <p:nvSpPr>
+          <p:cNvPr id="16" name="TextBox 15"/>
+          <p:cNvSpPr txBox="1"/>
+          <p:nvPr/>
+        </p:nvSpPr>
+        <p:spPr>
+          <a:xfrm>
+            <a:off x="6291072" y="3383280"/>
+            <a:ext cx="5157216" cy="512063"/>
+          </a:xfrm>
+          <a:prstGeom prst="rect">
+            <a:avLst/>
+          </a:prstGeom>
+          <a:noFill/>
+        </p:spPr>
+        <p:txBody>
+          <a:bodyPr wrap="square" anchor="ctr">
+            <a:noAutofit/>
+          </a:bodyPr>
+          <a:lstStyle/>
+          <a:p>
+            <a:r>
+              <a:rPr sz="1100" b="1">
+                <a:solidFill>
+                  <a:srgbClr val="15201B"/>
+                </a:solidFill>
+                <a:latin typeface="Aptos"/>
+              </a:rPr>
+              <a:t>Why there</a:t>
+            </a:r>
+          </a:p>
+        </p:txBody>
+      </p:sp>
+      <p:sp>
+        <p:nvSpPr>
+          <p:cNvPr id="17" name="Rectangle 16"/>
+          <p:cNvSpPr/>
+          <p:nvPr/>
+        </p:nvSpPr>
+        <p:spPr>
+          <a:xfrm>
+            <a:off x="548640" y="3968496"/>
+            <a:ext cx="2560320" cy="658368"/>
+          </a:xfrm>
+          <a:prstGeom prst="rect">
+            <a:avLst/>
+          </a:prstGeom>
+          <a:solidFill>
+            <a:srgbClr val="FFFFFF"/>
+          </a:solidFill>
+          <a:ln w="12700">
+            <a:solidFill>
+              <a:srgbClr val="B9C2BB"/>
+            </a:solidFill>
+          </a:ln>
+          <a:effectLst/>
+        </p:spPr>
+        <p:style>
+          <a:lnRef idx="1">
+            <a:schemeClr val="accent1"/>
+          </a:lnRef>
+          <a:fillRef idx="3">
+            <a:schemeClr val="accent1"/>
+          </a:fillRef>
+          <a:effectRef idx="2">
+            <a:schemeClr val="accent1"/>
+          </a:effectRef>
+          <a:fontRef idx="minor">
+            <a:schemeClr val="lt1"/>
+          </a:fontRef>
+        </p:style>
+        <p:txBody>
+          <a:bodyPr rtlCol="0" anchor="ctr"/>
+          <a:lstStyle/>
+          <a:p/>
+        </p:txBody>
+      </p:sp>
+      <p:sp>
+        <p:nvSpPr>
+          <p:cNvPr id="18" name="TextBox 17"/>
+          <p:cNvSpPr txBox="1"/>
+          <p:nvPr/>
+        </p:nvSpPr>
+        <p:spPr>
+          <a:xfrm>
+            <a:off x="621792" y="4041648"/>
+            <a:ext cx="2414015" cy="512063"/>
+          </a:xfrm>
+          <a:prstGeom prst="rect">
+            <a:avLst/>
+          </a:prstGeom>
+          <a:noFill/>
+        </p:spPr>
+        <p:txBody>
+          <a:bodyPr wrap="square" anchor="ctr">
+            <a:noAutofit/>
+          </a:bodyPr>
+          <a:lstStyle/>
+          <a:p>
+            <a:r>
+              <a:rPr sz="1000" b="0">
+                <a:solidFill>
+                  <a:srgbClr val="53635B"/>
+                </a:solidFill>
+                <a:latin typeface="Aptos"/>
+              </a:rPr>
+              <a:t>Restriction Planner</a:t>
+            </a:r>
+          </a:p>
+        </p:txBody>
+      </p:sp>
+      <p:sp>
+        <p:nvSpPr>
+          <p:cNvPr id="19" name="Rectangle 18"/>
+          <p:cNvSpPr/>
+          <p:nvPr/>
+        </p:nvSpPr>
+        <p:spPr>
+          <a:xfrm>
+            <a:off x="3108960" y="3968496"/>
+            <a:ext cx="3108960" cy="658368"/>
+          </a:xfrm>
+          <a:prstGeom prst="rect">
+            <a:avLst/>
+          </a:prstGeom>
+          <a:solidFill>
+            <a:srgbClr val="FFFFFF"/>
+          </a:solidFill>
+          <a:ln w="12700">
+            <a:solidFill>
+              <a:srgbClr val="B9C2BB"/>
+            </a:solidFill>
+          </a:ln>
+          <a:effectLst/>
+        </p:spPr>
+        <p:style>
+          <a:lnRef idx="1">
+            <a:schemeClr val="accent1"/>
+          </a:lnRef>
+          <a:fillRef idx="3">
+            <a:schemeClr val="accent1"/>
+          </a:fillRef>
+          <a:effectRef idx="2">
+            <a:schemeClr val="accent1"/>
+          </a:effectRef>
+          <a:fontRef idx="minor">
+            <a:schemeClr val="lt1"/>
+          </a:fontRef>
+        </p:style>
+        <p:txBody>
+          <a:bodyPr rtlCol="0" anchor="ctr"/>
+          <a:lstStyle/>
+          <a:p/>
+        </p:txBody>
+      </p:sp>
+      <p:sp>
+        <p:nvSpPr>
+          <p:cNvPr id="20" name="TextBox 19"/>
+          <p:cNvSpPr txBox="1"/>
+          <p:nvPr/>
+        </p:nvSpPr>
+        <p:spPr>
+          <a:xfrm>
+            <a:off x="3182112" y="4041648"/>
+            <a:ext cx="2962656" cy="512063"/>
+          </a:xfrm>
+          <a:prstGeom prst="rect">
+            <a:avLst/>
+          </a:prstGeom>
+          <a:noFill/>
+        </p:spPr>
+        <p:txBody>
+          <a:bodyPr wrap="square" anchor="ctr">
+            <a:noAutofit/>
+          </a:bodyPr>
+          <a:lstStyle/>
+          <a:p>
+            <a:r>
+              <a:rPr sz="1000" b="0">
+                <a:solidFill>
+                  <a:srgbClr val="53635B"/>
+                </a:solidFill>
+                <a:latin typeface="Aptos"/>
+              </a:rPr>
+              <a:t>OCaml planner module</a:t>
+            </a:r>
+          </a:p>
+        </p:txBody>
+      </p:sp>
+      <p:sp>
+        <p:nvSpPr>
+          <p:cNvPr id="21" name="Rectangle 20"/>
+          <p:cNvSpPr/>
+          <p:nvPr/>
+        </p:nvSpPr>
+        <p:spPr>
+          <a:xfrm>
+            <a:off x="6217920" y="3968496"/>
+            <a:ext cx="5303520" cy="658368"/>
+          </a:xfrm>
+          <a:prstGeom prst="rect">
+            <a:avLst/>
+          </a:prstGeom>
+          <a:solidFill>
+            <a:srgbClr val="FFFFFF"/>
+          </a:solidFill>
+          <a:ln w="12700">
+            <a:solidFill>
+              <a:srgbClr val="B9C2BB"/>
+            </a:solidFill>
+          </a:ln>
+          <a:effectLst/>
+        </p:spPr>
+        <p:style>
+          <a:lnRef idx="1">
+            <a:schemeClr val="accent1"/>
+          </a:lnRef>
+          <a:fillRef idx="3">
+            <a:schemeClr val="accent1"/>
+          </a:fillRef>
+          <a:effectRef idx="2">
+            <a:schemeClr val="accent1"/>
+          </a:effectRef>
+          <a:fontRef idx="minor">
+            <a:schemeClr val="lt1"/>
+          </a:fontRef>
+        </p:style>
+        <p:txBody>
+          <a:bodyPr rtlCol="0" anchor="ctr"/>
+          <a:lstStyle/>
+          <a:p/>
+        </p:txBody>
+      </p:sp>
+      <p:sp>
+        <p:nvSpPr>
+          <p:cNvPr id="22" name="TextBox 21"/>
+          <p:cNvSpPr txBox="1"/>
+          <p:nvPr/>
+        </p:nvSpPr>
+        <p:spPr>
+          <a:xfrm>
+            <a:off x="6291072" y="4041648"/>
+            <a:ext cx="5157216" cy="512063"/>
+          </a:xfrm>
+          <a:prstGeom prst="rect">
+            <a:avLst/>
+          </a:prstGeom>
+          <a:noFill/>
+        </p:spPr>
+        <p:txBody>
+          <a:bodyPr wrap="square" anchor="ctr">
+            <a:noAutofit/>
+          </a:bodyPr>
+          <a:lstStyle/>
+          <a:p>
+            <a:r>
+              <a:rPr sz="1000" b="0">
+                <a:solidFill>
+                  <a:srgbClr val="53635B"/>
+                </a:solidFill>
+                <a:latin typeface="Aptos"/>
+              </a:rPr>
+              <a:t>The paper compares it to a database query planner. Dagents already has that layer.</a:t>
+            </a:r>
+          </a:p>
+        </p:txBody>
+      </p:sp>
+      <p:sp>
+        <p:nvSpPr>
+          <p:cNvPr id="23" name="Rectangle 22"/>
+          <p:cNvSpPr/>
+          <p:nvPr/>
+        </p:nvSpPr>
+        <p:spPr>
+          <a:xfrm>
+            <a:off x="548640" y="4626864"/>
+            <a:ext cx="2560320" cy="658368"/>
+          </a:xfrm>
+          <a:prstGeom prst="rect">
+            <a:avLst/>
+          </a:prstGeom>
+          <a:solidFill>
+            <a:srgbClr val="FFFFFF"/>
+          </a:solidFill>
+          <a:ln w="12700">
+            <a:solidFill>
+              <a:srgbClr val="B9C2BB"/>
+            </a:solidFill>
+          </a:ln>
+          <a:effectLst/>
+        </p:spPr>
+        <p:style>
+          <a:lnRef idx="1">
+            <a:schemeClr val="accent1"/>
+          </a:lnRef>
+          <a:fillRef idx="3">
+            <a:schemeClr val="accent1"/>
+          </a:fillRef>
+          <a:effectRef idx="2">
+            <a:schemeClr val="accent1"/>
+          </a:effectRef>
+          <a:fontRef idx="minor">
+            <a:schemeClr val="lt1"/>
+          </a:fontRef>
+        </p:style>
+        <p:txBody>
+          <a:bodyPr rtlCol="0" anchor="ctr"/>
+          <a:lstStyle/>
+          <a:p/>
+        </p:txBody>
+      </p:sp>
+      <p:sp>
+        <p:nvSpPr>
+          <p:cNvPr id="24" name="TextBox 23"/>
+          <p:cNvSpPr txBox="1"/>
+          <p:nvPr/>
+        </p:nvSpPr>
+        <p:spPr>
+          <a:xfrm>
+            <a:off x="621792" y="4700016"/>
+            <a:ext cx="2414015" cy="512063"/>
+          </a:xfrm>
+          <a:prstGeom prst="rect">
+            <a:avLst/>
+          </a:prstGeom>
+          <a:noFill/>
+        </p:spPr>
+        <p:txBody>
+          <a:bodyPr wrap="square" anchor="ctr">
+            <a:noAutofit/>
+          </a:bodyPr>
+          <a:lstStyle/>
+          <a:p>
+            <a:r>
+              <a:rPr sz="1000" b="0">
+                <a:solidFill>
+                  <a:srgbClr val="53635B"/>
+                </a:solidFill>
+                <a:latin typeface="Aptos"/>
+              </a:rPr>
+              <a:t>Ethical Guard</a:t>
+            </a:r>
+          </a:p>
+        </p:txBody>
+      </p:sp>
+      <p:sp>
+        <p:nvSpPr>
+          <p:cNvPr id="25" name="Rectangle 24"/>
+          <p:cNvSpPr/>
+          <p:nvPr/>
+        </p:nvSpPr>
+        <p:spPr>
+          <a:xfrm>
+            <a:off x="3108960" y="4626864"/>
+            <a:ext cx="3108960" cy="658368"/>
+          </a:xfrm>
+          <a:prstGeom prst="rect">
+            <a:avLst/>
+          </a:prstGeom>
+          <a:solidFill>
+            <a:srgbClr val="FFFFFF"/>
+          </a:solidFill>
+          <a:ln w="12700">
+            <a:solidFill>
+              <a:srgbClr val="B9C2BB"/>
+            </a:solidFill>
+          </a:ln>
+          <a:effectLst/>
+        </p:spPr>
+        <p:style>
+          <a:lnRef idx="1">
+            <a:schemeClr val="accent1"/>
+          </a:lnRef>
+          <a:fillRef idx="3">
+            <a:schemeClr val="accent1"/>
+          </a:fillRef>
+          <a:effectRef idx="2">
+            <a:schemeClr val="accent1"/>
+          </a:effectRef>
+          <a:fontRef idx="minor">
+            <a:schemeClr val="lt1"/>
+          </a:fontRef>
+        </p:style>
+        <p:txBody>
+          <a:bodyPr rtlCol="0" anchor="ctr"/>
+          <a:lstStyle/>
+          <a:p/>
+        </p:txBody>
+      </p:sp>
+      <p:sp>
+        <p:nvSpPr>
+          <p:cNvPr id="26" name="TextBox 25"/>
+          <p:cNvSpPr txBox="1"/>
+          <p:nvPr/>
+        </p:nvSpPr>
+        <p:spPr>
+          <a:xfrm>
+            <a:off x="3182112" y="4700016"/>
+            <a:ext cx="2962656" cy="512063"/>
+          </a:xfrm>
+          <a:prstGeom prst="rect">
+            <a:avLst/>
+          </a:prstGeom>
+          <a:noFill/>
+        </p:spPr>
+        <p:txBody>
+          <a:bodyPr wrap="square" anchor="ctr">
+            <a:noAutofit/>
+          </a:bodyPr>
+          <a:lstStyle/>
+          <a:p>
+            <a:r>
+              <a:rPr sz="1000" b="0">
+                <a:solidFill>
+                  <a:srgbClr val="53635B"/>
+                </a:solidFill>
+                <a:latin typeface="Aptos"/>
+              </a:rPr>
+              <a:t>LMA and GMA request path</a:t>
+            </a:r>
+          </a:p>
+        </p:txBody>
+      </p:sp>
+      <p:sp>
+        <p:nvSpPr>
+          <p:cNvPr id="27" name="Rectangle 26"/>
+          <p:cNvSpPr/>
+          <p:nvPr/>
+        </p:nvSpPr>
+        <p:spPr>
+          <a:xfrm>
+            <a:off x="6217920" y="4626864"/>
+            <a:ext cx="5303520" cy="658368"/>
+          </a:xfrm>
+          <a:prstGeom prst="rect">
+            <a:avLst/>
+          </a:prstGeom>
+          <a:solidFill>
+            <a:srgbClr val="FFFFFF"/>
+          </a:solidFill>
+          <a:ln w="12700">
+            <a:solidFill>
+              <a:srgbClr val="B9C2BB"/>
+            </a:solidFill>
+          </a:ln>
+          <a:effectLst/>
+        </p:spPr>
+        <p:style>
+          <a:lnRef idx="1">
+            <a:schemeClr val="accent1"/>
+          </a:lnRef>
+          <a:fillRef idx="3">
+            <a:schemeClr val="accent1"/>
+          </a:fillRef>
+          <a:effectRef idx="2">
+            <a:schemeClr val="accent1"/>
+          </a:effectRef>
+          <a:fontRef idx="minor">
+            <a:schemeClr val="lt1"/>
+          </a:fontRef>
+        </p:style>
+        <p:txBody>
+          <a:bodyPr rtlCol="0" anchor="ctr"/>
+          <a:lstStyle/>
+          <a:p/>
+        </p:txBody>
+      </p:sp>
+      <p:sp>
+        <p:nvSpPr>
+          <p:cNvPr id="28" name="TextBox 27"/>
+          <p:cNvSpPr txBox="1"/>
+          <p:nvPr/>
+        </p:nvSpPr>
+        <p:spPr>
+          <a:xfrm>
+            <a:off x="6291072" y="4700016"/>
+            <a:ext cx="5157216" cy="512063"/>
+          </a:xfrm>
+          <a:prstGeom prst="rect">
+            <a:avLst/>
+          </a:prstGeom>
+          <a:noFill/>
+        </p:spPr>
+        <p:txBody>
+          <a:bodyPr wrap="square" anchor="ctr">
+            <a:noAutofit/>
+          </a:bodyPr>
+          <a:lstStyle/>
+          <a:p>
+            <a:r>
+              <a:rPr sz="1000" b="0">
+                <a:solidFill>
+                  <a:srgbClr val="53635B"/>
+                </a:solidFill>
+                <a:latin typeface="Aptos"/>
+              </a:rPr>
+              <a:t>Enforcement needs real data, a real requester, and an audit log.</a:t>
+            </a:r>
+          </a:p>
+        </p:txBody>
+      </p:sp>
+      <p:sp>
+        <p:nvSpPr>
+          <p:cNvPr id="29" name="Rectangle 28"/>
+          <p:cNvSpPr/>
+          <p:nvPr/>
+        </p:nvSpPr>
+        <p:spPr>
+          <a:xfrm>
+            <a:off x="548640" y="5285232"/>
+            <a:ext cx="2560320" cy="658368"/>
+          </a:xfrm>
+          <a:prstGeom prst="rect">
+            <a:avLst/>
+          </a:prstGeom>
+          <a:solidFill>
+            <a:srgbClr val="FFFFFF"/>
+          </a:solidFill>
+          <a:ln w="12700">
+            <a:solidFill>
+              <a:srgbClr val="B9C2BB"/>
+            </a:solidFill>
+          </a:ln>
+          <a:effectLst/>
+        </p:spPr>
+        <p:style>
+          <a:lnRef idx="1">
+            <a:schemeClr val="accent1"/>
+          </a:lnRef>
+          <a:fillRef idx="3">
+            <a:schemeClr val="accent1"/>
+          </a:fillRef>
+          <a:effectRef idx="2">
+            <a:schemeClr val="accent1"/>
+          </a:effectRef>
+          <a:fontRef idx="minor">
+            <a:schemeClr val="lt1"/>
+          </a:fontRef>
+        </p:style>
+        <p:txBody>
+          <a:bodyPr rtlCol="0" anchor="ctr"/>
+          <a:lstStyle/>
+          <a:p/>
+        </p:txBody>
+      </p:sp>
+      <p:sp>
+        <p:nvSpPr>
+          <p:cNvPr id="30" name="TextBox 29"/>
+          <p:cNvSpPr txBox="1"/>
+          <p:nvPr/>
+        </p:nvSpPr>
+        <p:spPr>
+          <a:xfrm>
+            <a:off x="621792" y="5358384"/>
+            <a:ext cx="2414015" cy="512063"/>
+          </a:xfrm>
+          <a:prstGeom prst="rect">
+            <a:avLst/>
+          </a:prstGeom>
+          <a:noFill/>
+        </p:spPr>
+        <p:txBody>
+          <a:bodyPr wrap="square" anchor="ctr">
+            <a:noAutofit/>
+          </a:bodyPr>
+          <a:lstStyle/>
+          <a:p>
+            <a:r>
+              <a:rPr sz="1000" b="0">
+                <a:solidFill>
+                  <a:srgbClr val="53635B"/>
+                </a:solidFill>
+                <a:latin typeface="Aptos"/>
+              </a:rPr>
+              <a:t>Rules and regulations</a:t>
+            </a:r>
+          </a:p>
+        </p:txBody>
+      </p:sp>
+      <p:sp>
+        <p:nvSpPr>
+          <p:cNvPr id="31" name="Rectangle 30"/>
+          <p:cNvSpPr/>
+          <p:nvPr/>
+        </p:nvSpPr>
+        <p:spPr>
+          <a:xfrm>
+            <a:off x="3108960" y="5285232"/>
+            <a:ext cx="3108960" cy="658368"/>
+          </a:xfrm>
+          <a:prstGeom prst="rect">
+            <a:avLst/>
+          </a:prstGeom>
+          <a:solidFill>
+            <a:srgbClr val="FFFFFF"/>
+          </a:solidFill>
+          <a:ln w="12700">
+            <a:solidFill>
+              <a:srgbClr val="B9C2BB"/>
+            </a:solidFill>
+          </a:ln>
+          <a:effectLst/>
+        </p:spPr>
+        <p:style>
+          <a:lnRef idx="1">
+            <a:schemeClr val="accent1"/>
+          </a:lnRef>
+          <a:fillRef idx="3">
+            <a:schemeClr val="accent1"/>
+          </a:fillRef>
+          <a:effectRef idx="2">
+            <a:schemeClr val="accent1"/>
+          </a:effectRef>
+          <a:fontRef idx="minor">
+            <a:schemeClr val="lt1"/>
+          </a:fontRef>
+        </p:style>
+        <p:txBody>
+          <a:bodyPr rtlCol="0" anchor="ctr"/>
+          <a:lstStyle/>
+          <a:p/>
+        </p:txBody>
+      </p:sp>
+      <p:sp>
+        <p:nvSpPr>
+          <p:cNvPr id="32" name="TextBox 31"/>
+          <p:cNvSpPr txBox="1"/>
+          <p:nvPr/>
+        </p:nvSpPr>
+        <p:spPr>
+          <a:xfrm>
+            <a:off x="3182112" y="5358384"/>
+            <a:ext cx="2962656" cy="512063"/>
+          </a:xfrm>
+          <a:prstGeom prst="rect">
+            <a:avLst/>
+          </a:prstGeom>
+          <a:noFill/>
+        </p:spPr>
+        <p:txBody>
+          <a:bodyPr wrap="square" anchor="ctr">
+            <a:noAutofit/>
+          </a:bodyPr>
+          <a:lstStyle/>
+          <a:p>
+            <a:r>
+              <a:rPr sz="1000" b="0">
+                <a:solidFill>
+                  <a:srgbClr val="53635B"/>
+                </a:solidFill>
+                <a:latin typeface="Aptos"/>
+              </a:rPr>
+              <a:t>Configuration, not code</a:t>
+            </a:r>
+          </a:p>
+        </p:txBody>
+      </p:sp>
+      <p:sp>
+        <p:nvSpPr>
+          <p:cNvPr id="33" name="Rectangle 32"/>
+          <p:cNvSpPr/>
+          <p:nvPr/>
+        </p:nvSpPr>
+        <p:spPr>
+          <a:xfrm>
+            <a:off x="6217920" y="5285232"/>
+            <a:ext cx="5303520" cy="658368"/>
+          </a:xfrm>
+          <a:prstGeom prst="rect">
+            <a:avLst/>
+          </a:prstGeom>
+          <a:solidFill>
+            <a:srgbClr val="FFFFFF"/>
+          </a:solidFill>
+          <a:ln w="12700">
+            <a:solidFill>
+              <a:srgbClr val="B9C2BB"/>
+            </a:solidFill>
+          </a:ln>
+          <a:effectLst/>
+        </p:spPr>
+        <p:style>
+          <a:lnRef idx="1">
+            <a:schemeClr val="accent1"/>
+          </a:lnRef>
+          <a:fillRef idx="3">
+            <a:schemeClr val="accent1"/>
+          </a:fillRef>
+          <a:effectRef idx="2">
+            <a:schemeClr val="accent1"/>
+          </a:effectRef>
+          <a:fontRef idx="minor">
+            <a:schemeClr val="lt1"/>
+          </a:fontRef>
+        </p:style>
+        <p:txBody>
+          <a:bodyPr rtlCol="0" anchor="ctr"/>
+          <a:lstStyle/>
+          <a:p/>
+        </p:txBody>
+      </p:sp>
+      <p:sp>
+        <p:nvSpPr>
+          <p:cNvPr id="34" name="TextBox 33"/>
+          <p:cNvSpPr txBox="1"/>
+          <p:nvPr/>
+        </p:nvSpPr>
+        <p:spPr>
+          <a:xfrm>
+            <a:off x="6291072" y="5358384"/>
+            <a:ext cx="5157216" cy="512063"/>
+          </a:xfrm>
+          <a:prstGeom prst="rect">
+            <a:avLst/>
+          </a:prstGeom>
+          <a:noFill/>
+        </p:spPr>
+        <p:txBody>
+          <a:bodyPr wrap="square" anchor="ctr">
+            <a:noAutofit/>
+          </a:bodyPr>
+          <a:lstStyle/>
+          <a:p>
+            <a:r>
+              <a:rPr sz="1000" b="0">
+                <a:solidFill>
+                  <a:srgbClr val="53635B"/>
+                </a:solidFill>
+                <a:latin typeface="Aptos"/>
+              </a:rPr>
+              <a:t>Hospital policy changes far more often than the framework does.</a:t>
+            </a:r>
+          </a:p>
+        </p:txBody>
+      </p:sp>
+      <p:sp>
+        <p:nvSpPr>
+          <p:cNvPr id="35" name="TextBox 34"/>
+          <p:cNvSpPr txBox="1"/>
+          <p:nvPr/>
+        </p:nvSpPr>
+        <p:spPr>
+          <a:xfrm>
+            <a:off x="566928" y="6355080"/>
+            <a:ext cx="5669280" cy="274320"/>
+          </a:xfrm>
+          <a:prstGeom prst="rect">
+            <a:avLst/>
+          </a:prstGeom>
+          <a:noFill/>
+        </p:spPr>
+        <p:txBody>
+          <a:bodyPr wrap="square">
+            <a:noAutofit/>
+          </a:bodyPr>
+          <a:lstStyle/>
+          <a:p>
+            <a:r>
+              <a:rPr sz="800" b="0">
+                <a:solidFill>
+                  <a:srgbClr val="53635B"/>
+                </a:solidFill>
+                <a:latin typeface="Aptos"/>
+              </a:rPr>
+              <a:t>Plan first, then enforce / 24</a:t>
+            </a:r>
+          </a:p>
+        </p:txBody>
+      </p:sp>
+    </p:spTree>
+  </p:cSld>
+  <p:clrMapOvr>
+    <a:masterClrMapping/>
+  </p:clrMapOvr>
+</p:sld>
+</file>
+
 <file path=ppt/slides/slide4.xml><?xml version="1.0" encoding="utf-8"?>
 <p:sld xmlns:a="http://schemas.openxmlformats.org/drawingml/2006/main" xmlns:r="http://schemas.openxmlformats.org/officeDocument/2006/relationships" xmlns:p="http://schemas.openxmlformats.org/presentationml/2006/main">
   <p:cSld>
@@ -37289,6 +41617,1508 @@
         <p14:creationId xmlns:p14="http://schemas.microsoft.com/office/powerpoint/2010/main" val="738132797"/>
       </p:ext>
     </p:extLst>
+  </p:cSld>
+  <p:clrMapOvr>
+    <a:masterClrMapping/>
+  </p:clrMapOvr>
+</p:sld>
+</file>
+
+<file path=ppt/slides/slide40.xml><?xml version="1.0" encoding="utf-8"?>
+<p:sld xmlns:a="http://schemas.openxmlformats.org/drawingml/2006/main" xmlns:p="http://schemas.openxmlformats.org/presentationml/2006/main" xmlns:r="http://schemas.openxmlformats.org/officeDocument/2006/relationships">
+  <p:cSld>
+    <p:bg>
+      <p:bgPr>
+        <a:solidFill>
+          <a:srgbClr val="F7F3EA"/>
+        </a:solidFill>
+        <a:effectLst/>
+      </p:bgPr>
+    </p:bg>
+    <p:spTree>
+      <p:nvGrpSpPr>
+        <p:cNvPr id="1" name=""/>
+        <p:cNvGrpSpPr/>
+        <p:nvPr/>
+      </p:nvGrpSpPr>
+      <p:grpSpPr/>
+      <p:sp>
+        <p:nvSpPr>
+          <p:cNvPr id="2" name="TextBox 1"/>
+          <p:cNvSpPr txBox="1"/>
+          <p:nvPr/>
+        </p:nvSpPr>
+        <p:spPr>
+          <a:xfrm>
+            <a:off x="548640" y="320040"/>
+            <a:ext cx="2377440" cy="292608"/>
+          </a:xfrm>
+          <a:prstGeom prst="rect">
+            <a:avLst/>
+          </a:prstGeom>
+          <a:noFill/>
+        </p:spPr>
+        <p:txBody>
+          <a:bodyPr wrap="square">
+            <a:noAutofit/>
+          </a:bodyPr>
+          <a:lstStyle/>
+          <a:p>
+            <a:r>
+              <a:rPr sz="1300" b="1">
+                <a:solidFill>
+                  <a:srgbClr val="53635B"/>
+                </a:solidFill>
+                <a:latin typeface="Aptos"/>
+              </a:rPr>
+              <a:t>GRAILS + STROKE</a:t>
+            </a:r>
+          </a:p>
+        </p:txBody>
+      </p:sp>
+      <p:sp>
+        <p:nvSpPr>
+          <p:cNvPr id="3" name="TextBox 2"/>
+          <p:cNvSpPr txBox="1"/>
+          <p:nvPr/>
+        </p:nvSpPr>
+        <p:spPr>
+          <a:xfrm>
+            <a:off x="548640" y="658368"/>
+            <a:ext cx="10424160" cy="594360"/>
+          </a:xfrm>
+          <a:prstGeom prst="rect">
+            <a:avLst/>
+          </a:prstGeom>
+          <a:noFill/>
+        </p:spPr>
+        <p:txBody>
+          <a:bodyPr wrap="square">
+            <a:noAutofit/>
+          </a:bodyPr>
+          <a:lstStyle/>
+          <a:p>
+            <a:r>
+              <a:rPr sz="2900" b="1">
+                <a:solidFill>
+                  <a:srgbClr val="15201B"/>
+                </a:solidFill>
+                <a:latin typeface="Aptos"/>
+              </a:rPr>
+              <a:t>The guard stands at the four gates you already have.</a:t>
+            </a:r>
+          </a:p>
+        </p:txBody>
+      </p:sp>
+      <p:sp>
+        <p:nvSpPr>
+          <p:cNvPr id="4" name="TextBox 3"/>
+          <p:cNvSpPr txBox="1"/>
+          <p:nvPr/>
+        </p:nvSpPr>
+        <p:spPr>
+          <a:xfrm>
+            <a:off x="566928" y="1225296"/>
+            <a:ext cx="9784080" cy="521207"/>
+          </a:xfrm>
+          <a:prstGeom prst="rect">
+            <a:avLst/>
+          </a:prstGeom>
+          <a:noFill/>
+        </p:spPr>
+        <p:txBody>
+          <a:bodyPr wrap="square">
+            <a:noAutofit/>
+          </a:bodyPr>
+          <a:lstStyle/>
+          <a:p>
+            <a:r>
+              <a:rPr sz="1400" b="0">
+                <a:solidFill>
+                  <a:srgbClr val="53635B"/>
+                </a:solidFill>
+                <a:latin typeface="Aptos"/>
+              </a:rPr>
+              <a:t>GRAILS does not add a fifth gate. It makes the existing ones concrete and reviewable.</a:t>
+            </a:r>
+          </a:p>
+        </p:txBody>
+      </p:sp>
+      <p:sp>
+        <p:nvSpPr>
+          <p:cNvPr id="5" name="Rounded Rectangle 4"/>
+          <p:cNvSpPr/>
+          <p:nvPr/>
+        </p:nvSpPr>
+        <p:spPr>
+          <a:xfrm>
+            <a:off x="685800" y="1874519"/>
+            <a:ext cx="2423160" cy="2560320"/>
+          </a:xfrm>
+          <a:prstGeom prst="roundRect">
+            <a:avLst/>
+          </a:prstGeom>
+          <a:solidFill>
+            <a:srgbClr val="DCEBE1"/>
+          </a:solidFill>
+          <a:ln w="12700">
+            <a:solidFill>
+              <a:srgbClr val="B9C2BB"/>
+            </a:solidFill>
+          </a:ln>
+          <a:effectLst/>
+        </p:spPr>
+        <p:style>
+          <a:lnRef idx="1">
+            <a:schemeClr val="accent1"/>
+          </a:lnRef>
+          <a:fillRef idx="3">
+            <a:schemeClr val="accent1"/>
+          </a:fillRef>
+          <a:effectRef idx="2">
+            <a:schemeClr val="accent1"/>
+          </a:effectRef>
+          <a:fontRef idx="minor">
+            <a:schemeClr val="lt1"/>
+          </a:fontRef>
+        </p:style>
+        <p:txBody>
+          <a:bodyPr rtlCol="0" anchor="ctr"/>
+          <a:lstStyle/>
+          <a:p/>
+        </p:txBody>
+      </p:sp>
+      <p:sp>
+        <p:nvSpPr>
+          <p:cNvPr id="6" name="TextBox 5"/>
+          <p:cNvSpPr txBox="1"/>
+          <p:nvPr/>
+        </p:nvSpPr>
+        <p:spPr>
+          <a:xfrm>
+            <a:off x="850392" y="2020824"/>
+            <a:ext cx="2103120" cy="320040"/>
+          </a:xfrm>
+          <a:prstGeom prst="rect">
+            <a:avLst/>
+          </a:prstGeom>
+          <a:noFill/>
+        </p:spPr>
+        <p:txBody>
+          <a:bodyPr wrap="square">
+            <a:noAutofit/>
+          </a:bodyPr>
+          <a:lstStyle/>
+          <a:p>
+            <a:r>
+              <a:rPr sz="1500" b="1">
+                <a:solidFill>
+                  <a:srgbClr val="15201B"/>
+                </a:solidFill>
+                <a:latin typeface="Aptos"/>
+              </a:rPr>
+              <a:t>1. SCOPE + SITE</a:t>
+            </a:r>
+          </a:p>
+        </p:txBody>
+      </p:sp>
+      <p:sp>
+        <p:nvSpPr>
+          <p:cNvPr id="7" name="TextBox 6"/>
+          <p:cNvSpPr txBox="1"/>
+          <p:nvPr/>
+        </p:nvSpPr>
+        <p:spPr>
+          <a:xfrm>
+            <a:off x="850392" y="2404872"/>
+            <a:ext cx="2103120" cy="1901951"/>
+          </a:xfrm>
+          <a:prstGeom prst="rect">
+            <a:avLst/>
+          </a:prstGeom>
+          <a:noFill/>
+        </p:spPr>
+        <p:txBody>
+          <a:bodyPr wrap="square">
+            <a:noAutofit/>
+          </a:bodyPr>
+          <a:lstStyle/>
+          <a:p>
+            <a:r>
+              <a:rPr sz="1200" b="0">
+                <a:solidFill>
+                  <a:srgbClr val="53635B"/>
+                </a:solidFill>
+                <a:latin typeface="Aptos"/>
+              </a:rPr>
+              <a:t>The trust score decides whether this hospital, this study, and this requester may run at all.</a:t>
+            </a:r>
+          </a:p>
+        </p:txBody>
+      </p:sp>
+      <p:sp>
+        <p:nvSpPr>
+          <p:cNvPr id="8" name="TextBox 7"/>
+          <p:cNvSpPr txBox="1"/>
+          <p:nvPr/>
+        </p:nvSpPr>
+        <p:spPr>
+          <a:xfrm>
+            <a:off x="3154679" y="2898648"/>
+            <a:ext cx="320040" cy="521207"/>
+          </a:xfrm>
+          <a:prstGeom prst="rect">
+            <a:avLst/>
+          </a:prstGeom>
+          <a:noFill/>
+        </p:spPr>
+        <p:txBody>
+          <a:bodyPr wrap="square">
+            <a:noAutofit/>
+          </a:bodyPr>
+          <a:lstStyle/>
+          <a:p>
+            <a:r>
+              <a:rPr sz="2800" b="1">
+                <a:solidFill>
+                  <a:srgbClr val="53635B"/>
+                </a:solidFill>
+                <a:latin typeface="Aptos"/>
+              </a:rPr>
+              <a:t>→</a:t>
+            </a:r>
+          </a:p>
+        </p:txBody>
+      </p:sp>
+      <p:sp>
+        <p:nvSpPr>
+          <p:cNvPr id="9" name="Rounded Rectangle 8"/>
+          <p:cNvSpPr/>
+          <p:nvPr/>
+        </p:nvSpPr>
+        <p:spPr>
+          <a:xfrm>
+            <a:off x="3474720" y="1874519"/>
+            <a:ext cx="2423160" cy="2560320"/>
+          </a:xfrm>
+          <a:prstGeom prst="roundRect">
+            <a:avLst/>
+          </a:prstGeom>
+          <a:solidFill>
+            <a:srgbClr val="DCE7F1"/>
+          </a:solidFill>
+          <a:ln w="12700">
+            <a:solidFill>
+              <a:srgbClr val="B9C2BB"/>
+            </a:solidFill>
+          </a:ln>
+          <a:effectLst/>
+        </p:spPr>
+        <p:style>
+          <a:lnRef idx="1">
+            <a:schemeClr val="accent1"/>
+          </a:lnRef>
+          <a:fillRef idx="3">
+            <a:schemeClr val="accent1"/>
+          </a:fillRef>
+          <a:effectRef idx="2">
+            <a:schemeClr val="accent1"/>
+          </a:effectRef>
+          <a:fontRef idx="minor">
+            <a:schemeClr val="lt1"/>
+          </a:fontRef>
+        </p:style>
+        <p:txBody>
+          <a:bodyPr rtlCol="0" anchor="ctr"/>
+          <a:lstStyle/>
+          <a:p/>
+        </p:txBody>
+      </p:sp>
+      <p:sp>
+        <p:nvSpPr>
+          <p:cNvPr id="10" name="TextBox 9"/>
+          <p:cNvSpPr txBox="1"/>
+          <p:nvPr/>
+        </p:nvSpPr>
+        <p:spPr>
+          <a:xfrm>
+            <a:off x="3639312" y="2020824"/>
+            <a:ext cx="2103120" cy="320040"/>
+          </a:xfrm>
+          <a:prstGeom prst="rect">
+            <a:avLst/>
+          </a:prstGeom>
+          <a:noFill/>
+        </p:spPr>
+        <p:txBody>
+          <a:bodyPr wrap="square">
+            <a:noAutofit/>
+          </a:bodyPr>
+          <a:lstStyle/>
+          <a:p>
+            <a:r>
+              <a:rPr sz="1500" b="1">
+                <a:solidFill>
+                  <a:srgbClr val="15201B"/>
+                </a:solidFill>
+                <a:latin typeface="Aptos"/>
+              </a:rPr>
+              <a:t>2. CODE + DATA</a:t>
+            </a:r>
+          </a:p>
+        </p:txBody>
+      </p:sp>
+      <p:sp>
+        <p:nvSpPr>
+          <p:cNvPr id="11" name="TextBox 10"/>
+          <p:cNvSpPr txBox="1"/>
+          <p:nvPr/>
+        </p:nvSpPr>
+        <p:spPr>
+          <a:xfrm>
+            <a:off x="3639312" y="2404872"/>
+            <a:ext cx="2103120" cy="1901951"/>
+          </a:xfrm>
+          <a:prstGeom prst="rect">
+            <a:avLst/>
+          </a:prstGeom>
+          <a:noFill/>
+        </p:spPr>
+        <p:txBody>
+          <a:bodyPr wrap="square">
+            <a:noAutofit/>
+          </a:bodyPr>
+          <a:lstStyle/>
+          <a:p>
+            <a:r>
+              <a:rPr sz="1200" b="0">
+                <a:solidFill>
+                  <a:srgbClr val="53635B"/>
+                </a:solidFill>
+                <a:latin typeface="Aptos"/>
+              </a:rPr>
+              <a:t>Only fields on the stroke feature contract can be read. Anything else is refused before a scan is ever opened.</a:t>
+            </a:r>
+          </a:p>
+        </p:txBody>
+      </p:sp>
+      <p:sp>
+        <p:nvSpPr>
+          <p:cNvPr id="12" name="TextBox 11"/>
+          <p:cNvSpPr txBox="1"/>
+          <p:nvPr/>
+        </p:nvSpPr>
+        <p:spPr>
+          <a:xfrm>
+            <a:off x="5943599" y="2898648"/>
+            <a:ext cx="320040" cy="521207"/>
+          </a:xfrm>
+          <a:prstGeom prst="rect">
+            <a:avLst/>
+          </a:prstGeom>
+          <a:noFill/>
+        </p:spPr>
+        <p:txBody>
+          <a:bodyPr wrap="square">
+            <a:noAutofit/>
+          </a:bodyPr>
+          <a:lstStyle/>
+          <a:p>
+            <a:r>
+              <a:rPr sz="2800" b="1">
+                <a:solidFill>
+                  <a:srgbClr val="53635B"/>
+                </a:solidFill>
+                <a:latin typeface="Aptos"/>
+              </a:rPr>
+              <a:t>→</a:t>
+            </a:r>
+          </a:p>
+        </p:txBody>
+      </p:sp>
+      <p:sp>
+        <p:nvSpPr>
+          <p:cNvPr id="13" name="Rounded Rectangle 12"/>
+          <p:cNvSpPr/>
+          <p:nvPr/>
+        </p:nvSpPr>
+        <p:spPr>
+          <a:xfrm>
+            <a:off x="6263640" y="1874519"/>
+            <a:ext cx="2423160" cy="2560320"/>
+          </a:xfrm>
+          <a:prstGeom prst="roundRect">
+            <a:avLst/>
+          </a:prstGeom>
+          <a:solidFill>
+            <a:srgbClr val="F4E8D0"/>
+          </a:solidFill>
+          <a:ln w="12700">
+            <a:solidFill>
+              <a:srgbClr val="B9C2BB"/>
+            </a:solidFill>
+          </a:ln>
+          <a:effectLst/>
+        </p:spPr>
+        <p:style>
+          <a:lnRef idx="1">
+            <a:schemeClr val="accent1"/>
+          </a:lnRef>
+          <a:fillRef idx="3">
+            <a:schemeClr val="accent1"/>
+          </a:fillRef>
+          <a:effectRef idx="2">
+            <a:schemeClr val="accent1"/>
+          </a:effectRef>
+          <a:fontRef idx="minor">
+            <a:schemeClr val="lt1"/>
+          </a:fontRef>
+        </p:style>
+        <p:txBody>
+          <a:bodyPr rtlCol="0" anchor="ctr"/>
+          <a:lstStyle/>
+          <a:p/>
+        </p:txBody>
+      </p:sp>
+      <p:sp>
+        <p:nvSpPr>
+          <p:cNvPr id="14" name="TextBox 13"/>
+          <p:cNvSpPr txBox="1"/>
+          <p:nvPr/>
+        </p:nvSpPr>
+        <p:spPr>
+          <a:xfrm>
+            <a:off x="6428231" y="2020824"/>
+            <a:ext cx="2103120" cy="320040"/>
+          </a:xfrm>
+          <a:prstGeom prst="rect">
+            <a:avLst/>
+          </a:prstGeom>
+          <a:noFill/>
+        </p:spPr>
+        <p:txBody>
+          <a:bodyPr wrap="square">
+            <a:noAutofit/>
+          </a:bodyPr>
+          <a:lstStyle/>
+          <a:p>
+            <a:r>
+              <a:rPr sz="1500" b="1">
+                <a:solidFill>
+                  <a:srgbClr val="15201B"/>
+                </a:solidFill>
+                <a:latin typeface="Aptos"/>
+              </a:rPr>
+              <a:t>3. PRIVACY</a:t>
+            </a:r>
+          </a:p>
+        </p:txBody>
+      </p:sp>
+      <p:sp>
+        <p:nvSpPr>
+          <p:cNvPr id="15" name="TextBox 14"/>
+          <p:cNvSpPr txBox="1"/>
+          <p:nvPr/>
+        </p:nvSpPr>
+        <p:spPr>
+          <a:xfrm>
+            <a:off x="6428231" y="2404872"/>
+            <a:ext cx="2103120" cy="1901951"/>
+          </a:xfrm>
+          <a:prstGeom prst="rect">
+            <a:avLst/>
+          </a:prstGeom>
+          <a:noFill/>
+        </p:spPr>
+        <p:txBody>
+          <a:bodyPr wrap="square">
+            <a:noAutofit/>
+          </a:bodyPr>
+          <a:lstStyle/>
+          <a:p>
+            <a:r>
+              <a:rPr sz="1200" b="0">
+                <a:solidFill>
+                  <a:srgbClr val="53635B"/>
+                </a:solidFill>
+                <a:latin typeface="Aptos"/>
+              </a:rPr>
+              <a:t>The restriction plan sets the limit on the update and the counts before they leave the hospital network.</a:t>
+            </a:r>
+          </a:p>
+        </p:txBody>
+      </p:sp>
+      <p:sp>
+        <p:nvSpPr>
+          <p:cNvPr id="16" name="TextBox 15"/>
+          <p:cNvSpPr txBox="1"/>
+          <p:nvPr/>
+        </p:nvSpPr>
+        <p:spPr>
+          <a:xfrm>
+            <a:off x="8732520" y="2898648"/>
+            <a:ext cx="320040" cy="521207"/>
+          </a:xfrm>
+          <a:prstGeom prst="rect">
+            <a:avLst/>
+          </a:prstGeom>
+          <a:noFill/>
+        </p:spPr>
+        <p:txBody>
+          <a:bodyPr wrap="square">
+            <a:noAutofit/>
+          </a:bodyPr>
+          <a:lstStyle/>
+          <a:p>
+            <a:r>
+              <a:rPr sz="2800" b="1">
+                <a:solidFill>
+                  <a:srgbClr val="53635B"/>
+                </a:solidFill>
+                <a:latin typeface="Aptos"/>
+              </a:rPr>
+              <a:t>→</a:t>
+            </a:r>
+          </a:p>
+        </p:txBody>
+      </p:sp>
+      <p:sp>
+        <p:nvSpPr>
+          <p:cNvPr id="17" name="Rounded Rectangle 16"/>
+          <p:cNvSpPr/>
+          <p:nvPr/>
+        </p:nvSpPr>
+        <p:spPr>
+          <a:xfrm>
+            <a:off x="9052559" y="1874519"/>
+            <a:ext cx="2423160" cy="2560320"/>
+          </a:xfrm>
+          <a:prstGeom prst="roundRect">
+            <a:avLst/>
+          </a:prstGeom>
+          <a:solidFill>
+            <a:srgbClr val="E9E1FA"/>
+          </a:solidFill>
+          <a:ln w="12700">
+            <a:solidFill>
+              <a:srgbClr val="B9C2BB"/>
+            </a:solidFill>
+          </a:ln>
+          <a:effectLst/>
+        </p:spPr>
+        <p:style>
+          <a:lnRef idx="1">
+            <a:schemeClr val="accent1"/>
+          </a:lnRef>
+          <a:fillRef idx="3">
+            <a:schemeClr val="accent1"/>
+          </a:fillRef>
+          <a:effectRef idx="2">
+            <a:schemeClr val="accent1"/>
+          </a:effectRef>
+          <a:fontRef idx="minor">
+            <a:schemeClr val="lt1"/>
+          </a:fontRef>
+        </p:style>
+        <p:txBody>
+          <a:bodyPr rtlCol="0" anchor="ctr"/>
+          <a:lstStyle/>
+          <a:p/>
+        </p:txBody>
+      </p:sp>
+      <p:sp>
+        <p:nvSpPr>
+          <p:cNvPr id="18" name="TextBox 17"/>
+          <p:cNvSpPr txBox="1"/>
+          <p:nvPr/>
+        </p:nvSpPr>
+        <p:spPr>
+          <a:xfrm>
+            <a:off x="9217151" y="2020824"/>
+            <a:ext cx="2103120" cy="320040"/>
+          </a:xfrm>
+          <a:prstGeom prst="rect">
+            <a:avLst/>
+          </a:prstGeom>
+          <a:noFill/>
+        </p:spPr>
+        <p:txBody>
+          <a:bodyPr wrap="square">
+            <a:noAutofit/>
+          </a:bodyPr>
+          <a:lstStyle/>
+          <a:p>
+            <a:r>
+              <a:rPr sz="1500" b="1">
+                <a:solidFill>
+                  <a:srgbClr val="15201B"/>
+                </a:solidFill>
+                <a:latin typeface="Aptos"/>
+              </a:rPr>
+              <a:t>4. RELEASE</a:t>
+            </a:r>
+          </a:p>
+        </p:txBody>
+      </p:sp>
+      <p:sp>
+        <p:nvSpPr>
+          <p:cNvPr id="19" name="TextBox 18"/>
+          <p:cNvSpPr txBox="1"/>
+          <p:nvPr/>
+        </p:nvSpPr>
+        <p:spPr>
+          <a:xfrm>
+            <a:off x="9217151" y="2404872"/>
+            <a:ext cx="2103120" cy="1901951"/>
+          </a:xfrm>
+          <a:prstGeom prst="rect">
+            <a:avLst/>
+          </a:prstGeom>
+          <a:noFill/>
+        </p:spPr>
+        <p:txBody>
+          <a:bodyPr wrap="square">
+            <a:noAutofit/>
+          </a:bodyPr>
+          <a:lstStyle/>
+          <a:p>
+            <a:r>
+              <a:rPr sz="1200" b="0">
+                <a:solidFill>
+                  <a:srgbClr val="53635B"/>
+                </a:solidFill>
+                <a:latin typeface="Aptos"/>
+              </a:rPr>
+              <a:t>The GMA checks the plan was followed and the evidence exists before it signs anything as released.</a:t>
+            </a:r>
+          </a:p>
+        </p:txBody>
+      </p:sp>
+      <p:sp>
+        <p:nvSpPr>
+          <p:cNvPr id="20" name="TextBox 19"/>
+          <p:cNvSpPr txBox="1"/>
+          <p:nvPr/>
+        </p:nvSpPr>
+        <p:spPr>
+          <a:xfrm>
+            <a:off x="914400" y="4800600"/>
+            <a:ext cx="9875520" cy="457200"/>
+          </a:xfrm>
+          <a:prstGeom prst="rect">
+            <a:avLst/>
+          </a:prstGeom>
+          <a:noFill/>
+        </p:spPr>
+        <p:txBody>
+          <a:bodyPr wrap="square">
+            <a:noAutofit/>
+          </a:bodyPr>
+          <a:lstStyle/>
+          <a:p>
+            <a:r>
+              <a:rPr sz="1200" b="1">
+                <a:solidFill>
+                  <a:srgbClr val="15201B"/>
+                </a:solidFill>
+                <a:latin typeface="Aptos"/>
+              </a:rPr>
+              <a:t>Every decision writes down what it decided, why, and which round it belonged to.</a:t>
+            </a:r>
+          </a:p>
+        </p:txBody>
+      </p:sp>
+      <p:sp>
+        <p:nvSpPr>
+          <p:cNvPr id="21" name="TextBox 20"/>
+          <p:cNvSpPr txBox="1"/>
+          <p:nvPr/>
+        </p:nvSpPr>
+        <p:spPr>
+          <a:xfrm>
+            <a:off x="566928" y="6355080"/>
+            <a:ext cx="5669280" cy="274320"/>
+          </a:xfrm>
+          <a:prstGeom prst="rect">
+            <a:avLst/>
+          </a:prstGeom>
+          <a:noFill/>
+        </p:spPr>
+        <p:txBody>
+          <a:bodyPr wrap="square">
+            <a:noAutofit/>
+          </a:bodyPr>
+          <a:lstStyle/>
+          <a:p>
+            <a:r>
+              <a:rPr sz="800" b="0">
+                <a:solidFill>
+                  <a:srgbClr val="53635B"/>
+                </a:solidFill>
+                <a:latin typeface="Aptos"/>
+              </a:rPr>
+              <a:t>Guard placement on the existing gates / 25</a:t>
+            </a:r>
+          </a:p>
+        </p:txBody>
+      </p:sp>
+    </p:spTree>
+  </p:cSld>
+  <p:clrMapOvr>
+    <a:masterClrMapping/>
+  </p:clrMapOvr>
+</p:sld>
+</file>
+
+<file path=ppt/slides/slide41.xml><?xml version="1.0" encoding="utf-8"?>
+<p:sld xmlns:a="http://schemas.openxmlformats.org/drawingml/2006/main" xmlns:p="http://schemas.openxmlformats.org/presentationml/2006/main" xmlns:r="http://schemas.openxmlformats.org/officeDocument/2006/relationships">
+  <p:cSld>
+    <p:bg>
+      <p:bgPr>
+        <a:solidFill>
+          <a:srgbClr val="F7F3EA"/>
+        </a:solidFill>
+        <a:effectLst/>
+      </p:bgPr>
+    </p:bg>
+    <p:spTree>
+      <p:nvGrpSpPr>
+        <p:cNvPr id="1" name=""/>
+        <p:cNvGrpSpPr/>
+        <p:nvPr/>
+      </p:nvGrpSpPr>
+      <p:grpSpPr/>
+      <p:sp>
+        <p:nvSpPr>
+          <p:cNvPr id="2" name="TextBox 1"/>
+          <p:cNvSpPr txBox="1"/>
+          <p:nvPr/>
+        </p:nvSpPr>
+        <p:spPr>
+          <a:xfrm>
+            <a:off x="548640" y="320040"/>
+            <a:ext cx="2377440" cy="292608"/>
+          </a:xfrm>
+          <a:prstGeom prst="rect">
+            <a:avLst/>
+          </a:prstGeom>
+          <a:noFill/>
+        </p:spPr>
+        <p:txBody>
+          <a:bodyPr wrap="square">
+            <a:noAutofit/>
+          </a:bodyPr>
+          <a:lstStyle/>
+          <a:p>
+            <a:r>
+              <a:rPr sz="1300" b="1">
+                <a:solidFill>
+                  <a:srgbClr val="53635B"/>
+                </a:solidFill>
+                <a:latin typeface="Aptos"/>
+              </a:rPr>
+              <a:t>GRAILS + FEDERATION</a:t>
+            </a:r>
+          </a:p>
+        </p:txBody>
+      </p:sp>
+      <p:sp>
+        <p:nvSpPr>
+          <p:cNvPr id="3" name="TextBox 2"/>
+          <p:cNvSpPr txBox="1"/>
+          <p:nvPr/>
+        </p:nvSpPr>
+        <p:spPr>
+          <a:xfrm>
+            <a:off x="548640" y="658368"/>
+            <a:ext cx="10424160" cy="594360"/>
+          </a:xfrm>
+          <a:prstGeom prst="rect">
+            <a:avLst/>
+          </a:prstGeom>
+          <a:noFill/>
+        </p:spPr>
+        <p:txBody>
+          <a:bodyPr wrap="square">
+            <a:noAutofit/>
+          </a:bodyPr>
+          <a:lstStyle/>
+          <a:p>
+            <a:r>
+              <a:rPr sz="2900" b="1">
+                <a:solidFill>
+                  <a:srgbClr val="15201B"/>
+                </a:solidFill>
+                <a:latin typeface="Aptos"/>
+              </a:rPr>
+              <a:t>GRAILS protects rows. A stroke round sends updates.</a:t>
+            </a:r>
+          </a:p>
+        </p:txBody>
+      </p:sp>
+      <p:sp>
+        <p:nvSpPr>
+          <p:cNvPr id="4" name="TextBox 3"/>
+          <p:cNvSpPr txBox="1"/>
+          <p:nvPr/>
+        </p:nvSpPr>
+        <p:spPr>
+          <a:xfrm>
+            <a:off x="566928" y="1225296"/>
+            <a:ext cx="9784080" cy="521207"/>
+          </a:xfrm>
+          <a:prstGeom prst="rect">
+            <a:avLst/>
+          </a:prstGeom>
+          <a:noFill/>
+        </p:spPr>
+        <p:txBody>
+          <a:bodyPr wrap="square">
+            <a:noAutofit/>
+          </a:bodyPr>
+          <a:lstStyle/>
+          <a:p>
+            <a:r>
+              <a:rPr sz="1400" b="0">
+                <a:solidFill>
+                  <a:srgbClr val="53635B"/>
+                </a:solidFill>
+                <a:latin typeface="Aptos"/>
+              </a:rPr>
+              <a:t>This is the one place the framework has to be extended, and it is the contribution this project can make.</a:t>
+            </a:r>
+          </a:p>
+        </p:txBody>
+      </p:sp>
+      <p:sp>
+        <p:nvSpPr>
+          <p:cNvPr id="5" name="Rounded Rectangle 4"/>
+          <p:cNvSpPr/>
+          <p:nvPr/>
+        </p:nvSpPr>
+        <p:spPr>
+          <a:xfrm>
+            <a:off x="777240" y="1691640"/>
+            <a:ext cx="4892040" cy="1325880"/>
+          </a:xfrm>
+          <a:prstGeom prst="roundRect">
+            <a:avLst/>
+          </a:prstGeom>
+          <a:solidFill>
+            <a:srgbClr val="DCEBE1"/>
+          </a:solidFill>
+          <a:ln w="12700">
+            <a:solidFill>
+              <a:srgbClr val="B9C2BB"/>
+            </a:solidFill>
+          </a:ln>
+          <a:effectLst/>
+        </p:spPr>
+        <p:style>
+          <a:lnRef idx="1">
+            <a:schemeClr val="accent1"/>
+          </a:lnRef>
+          <a:fillRef idx="3">
+            <a:schemeClr val="accent1"/>
+          </a:fillRef>
+          <a:effectRef idx="2">
+            <a:schemeClr val="accent1"/>
+          </a:effectRef>
+          <a:fontRef idx="minor">
+            <a:schemeClr val="lt1"/>
+          </a:fontRef>
+        </p:style>
+        <p:txBody>
+          <a:bodyPr rtlCol="0" anchor="ctr"/>
+          <a:lstStyle/>
+          <a:p/>
+        </p:txBody>
+      </p:sp>
+      <p:sp>
+        <p:nvSpPr>
+          <p:cNvPr id="6" name="TextBox 5"/>
+          <p:cNvSpPr txBox="1"/>
+          <p:nvPr/>
+        </p:nvSpPr>
+        <p:spPr>
+          <a:xfrm>
+            <a:off x="941832" y="1837944"/>
+            <a:ext cx="4572000" cy="320040"/>
+          </a:xfrm>
+          <a:prstGeom prst="rect">
+            <a:avLst/>
+          </a:prstGeom>
+          <a:noFill/>
+        </p:spPr>
+        <p:txBody>
+          <a:bodyPr wrap="square">
+            <a:noAutofit/>
+          </a:bodyPr>
+          <a:lstStyle/>
+          <a:p>
+            <a:r>
+              <a:rPr sz="1500" b="1">
+                <a:solidFill>
+                  <a:srgbClr val="15201B"/>
+                </a:solidFill>
+                <a:latin typeface="Aptos"/>
+              </a:rPr>
+              <a:t>What it covers today</a:t>
+            </a:r>
+          </a:p>
+        </p:txBody>
+      </p:sp>
+      <p:sp>
+        <p:nvSpPr>
+          <p:cNvPr id="7" name="TextBox 6"/>
+          <p:cNvSpPr txBox="1"/>
+          <p:nvPr/>
+        </p:nvSpPr>
+        <p:spPr>
+          <a:xfrm>
+            <a:off x="941832" y="2221992"/>
+            <a:ext cx="4572000" cy="667511"/>
+          </a:xfrm>
+          <a:prstGeom prst="rect">
+            <a:avLst/>
+          </a:prstGeom>
+          <a:noFill/>
+        </p:spPr>
+        <p:txBody>
+          <a:bodyPr wrap="square">
+            <a:noAutofit/>
+          </a:bodyPr>
+          <a:lstStyle/>
+          <a:p>
+            <a:r>
+              <a:rPr sz="1200" b="0">
+                <a:solidFill>
+                  <a:srgbClr val="53635B"/>
+                </a:solidFill>
+                <a:latin typeface="Aptos"/>
+              </a:rPr>
+              <a:t>One value, one row, one column, or a whole table. All of them are data you can point at and read.</a:t>
+            </a:r>
+          </a:p>
+        </p:txBody>
+      </p:sp>
+      <p:sp>
+        <p:nvSpPr>
+          <p:cNvPr id="8" name="Rounded Rectangle 7"/>
+          <p:cNvSpPr/>
+          <p:nvPr/>
+        </p:nvSpPr>
+        <p:spPr>
+          <a:xfrm>
+            <a:off x="6217920" y="1691640"/>
+            <a:ext cx="4892040" cy="1325880"/>
+          </a:xfrm>
+          <a:prstGeom prst="roundRect">
+            <a:avLst/>
+          </a:prstGeom>
+          <a:solidFill>
+            <a:srgbClr val="F4E8D0"/>
+          </a:solidFill>
+          <a:ln w="12700">
+            <a:solidFill>
+              <a:srgbClr val="B9C2BB"/>
+            </a:solidFill>
+          </a:ln>
+          <a:effectLst/>
+        </p:spPr>
+        <p:style>
+          <a:lnRef idx="1">
+            <a:schemeClr val="accent1"/>
+          </a:lnRef>
+          <a:fillRef idx="3">
+            <a:schemeClr val="accent1"/>
+          </a:fillRef>
+          <a:effectRef idx="2">
+            <a:schemeClr val="accent1"/>
+          </a:effectRef>
+          <a:fontRef idx="minor">
+            <a:schemeClr val="lt1"/>
+          </a:fontRef>
+        </p:style>
+        <p:txBody>
+          <a:bodyPr rtlCol="0" anchor="ctr"/>
+          <a:lstStyle/>
+          <a:p/>
+        </p:txBody>
+      </p:sp>
+      <p:sp>
+        <p:nvSpPr>
+          <p:cNvPr id="9" name="TextBox 8"/>
+          <p:cNvSpPr txBox="1"/>
+          <p:nvPr/>
+        </p:nvSpPr>
+        <p:spPr>
+          <a:xfrm>
+            <a:off x="6382512" y="1837944"/>
+            <a:ext cx="4572000" cy="320040"/>
+          </a:xfrm>
+          <a:prstGeom prst="rect">
+            <a:avLst/>
+          </a:prstGeom>
+          <a:noFill/>
+        </p:spPr>
+        <p:txBody>
+          <a:bodyPr wrap="square">
+            <a:noAutofit/>
+          </a:bodyPr>
+          <a:lstStyle/>
+          <a:p>
+            <a:r>
+              <a:rPr sz="1500" b="1">
+                <a:solidFill>
+                  <a:srgbClr val="15201B"/>
+                </a:solidFill>
+                <a:latin typeface="Aptos"/>
+              </a:rPr>
+              <a:t>What a stroke round adds</a:t>
+            </a:r>
+          </a:p>
+        </p:txBody>
+      </p:sp>
+      <p:sp>
+        <p:nvSpPr>
+          <p:cNvPr id="10" name="TextBox 9"/>
+          <p:cNvSpPr txBox="1"/>
+          <p:nvPr/>
+        </p:nvSpPr>
+        <p:spPr>
+          <a:xfrm>
+            <a:off x="6382512" y="2221992"/>
+            <a:ext cx="4572000" cy="667511"/>
+          </a:xfrm>
+          <a:prstGeom prst="rect">
+            <a:avLst/>
+          </a:prstGeom>
+          <a:noFill/>
+        </p:spPr>
+        <p:txBody>
+          <a:bodyPr wrap="square">
+            <a:noAutofit/>
+          </a:bodyPr>
+          <a:lstStyle/>
+          <a:p>
+            <a:r>
+              <a:rPr sz="1200" b="0">
+                <a:solidFill>
+                  <a:srgbClr val="53635B"/>
+                </a:solidFill>
+                <a:latin typeface="Aptos"/>
+              </a:rPr>
+              <a:t>A model update is not a row, but it still carries patient signal. It has to become a fifth thing the rules cover.</a:t>
+            </a:r>
+          </a:p>
+        </p:txBody>
+      </p:sp>
+      <p:sp>
+        <p:nvSpPr>
+          <p:cNvPr id="11" name="Rounded Rectangle 10"/>
+          <p:cNvSpPr/>
+          <p:nvPr/>
+        </p:nvSpPr>
+        <p:spPr>
+          <a:xfrm>
+            <a:off x="777240" y="3246120"/>
+            <a:ext cx="3429000" cy="1417320"/>
+          </a:xfrm>
+          <a:prstGeom prst="roundRect">
+            <a:avLst/>
+          </a:prstGeom>
+          <a:solidFill>
+            <a:srgbClr val="E9E1FA"/>
+          </a:solidFill>
+          <a:ln w="12700">
+            <a:solidFill>
+              <a:srgbClr val="B9C2BB"/>
+            </a:solidFill>
+          </a:ln>
+          <a:effectLst/>
+        </p:spPr>
+        <p:style>
+          <a:lnRef idx="1">
+            <a:schemeClr val="accent1"/>
+          </a:lnRef>
+          <a:fillRef idx="3">
+            <a:schemeClr val="accent1"/>
+          </a:fillRef>
+          <a:effectRef idx="2">
+            <a:schemeClr val="accent1"/>
+          </a:effectRef>
+          <a:fontRef idx="minor">
+            <a:schemeClr val="lt1"/>
+          </a:fontRef>
+        </p:style>
+        <p:txBody>
+          <a:bodyPr rtlCol="0" anchor="ctr"/>
+          <a:lstStyle/>
+          <a:p/>
+        </p:txBody>
+      </p:sp>
+      <p:sp>
+        <p:nvSpPr>
+          <p:cNvPr id="12" name="TextBox 11"/>
+          <p:cNvSpPr txBox="1"/>
+          <p:nvPr/>
+        </p:nvSpPr>
+        <p:spPr>
+          <a:xfrm>
+            <a:off x="941832" y="3392424"/>
+            <a:ext cx="3108960" cy="320040"/>
+          </a:xfrm>
+          <a:prstGeom prst="rect">
+            <a:avLst/>
+          </a:prstGeom>
+          <a:noFill/>
+        </p:spPr>
+        <p:txBody>
+          <a:bodyPr wrap="square">
+            <a:noAutofit/>
+          </a:bodyPr>
+          <a:lstStyle/>
+          <a:p>
+            <a:r>
+              <a:rPr sz="1500" b="1">
+                <a:solidFill>
+                  <a:srgbClr val="15201B"/>
+                </a:solidFill>
+                <a:latin typeface="Aptos"/>
+              </a:rPr>
+              <a:t>Sensitivity becomes</a:t>
+            </a:r>
+          </a:p>
+        </p:txBody>
+      </p:sp>
+      <p:sp>
+        <p:nvSpPr>
+          <p:cNvPr id="13" name="TextBox 12"/>
+          <p:cNvSpPr txBox="1"/>
+          <p:nvPr/>
+        </p:nvSpPr>
+        <p:spPr>
+          <a:xfrm>
+            <a:off x="941832" y="3776472"/>
+            <a:ext cx="3108960" cy="758952"/>
+          </a:xfrm>
+          <a:prstGeom prst="rect">
+            <a:avLst/>
+          </a:prstGeom>
+          <a:noFill/>
+        </p:spPr>
+        <p:txBody>
+          <a:bodyPr wrap="square">
+            <a:noAutofit/>
+          </a:bodyPr>
+          <a:lstStyle/>
+          <a:p>
+            <a:r>
+              <a:rPr sz="1200" b="0">
+                <a:solidFill>
+                  <a:srgbClr val="53635B"/>
+                </a:solidFill>
+                <a:latin typeface="Aptos"/>
+              </a:rPr>
+              <a:t>How much stroke-patient signal an update can carry out of the hospital.</a:t>
+            </a:r>
+          </a:p>
+        </p:txBody>
+      </p:sp>
+      <p:sp>
+        <p:nvSpPr>
+          <p:cNvPr id="14" name="Rounded Rectangle 13"/>
+          <p:cNvSpPr/>
+          <p:nvPr/>
+        </p:nvSpPr>
+        <p:spPr>
+          <a:xfrm>
+            <a:off x="4434840" y="3246120"/>
+            <a:ext cx="3429000" cy="1417320"/>
+          </a:xfrm>
+          <a:prstGeom prst="roundRect">
+            <a:avLst/>
+          </a:prstGeom>
+          <a:solidFill>
+            <a:srgbClr val="DCE7F1"/>
+          </a:solidFill>
+          <a:ln w="12700">
+            <a:solidFill>
+              <a:srgbClr val="B9C2BB"/>
+            </a:solidFill>
+          </a:ln>
+          <a:effectLst/>
+        </p:spPr>
+        <p:style>
+          <a:lnRef idx="1">
+            <a:schemeClr val="accent1"/>
+          </a:lnRef>
+          <a:fillRef idx="3">
+            <a:schemeClr val="accent1"/>
+          </a:fillRef>
+          <a:effectRef idx="2">
+            <a:schemeClr val="accent1"/>
+          </a:effectRef>
+          <a:fontRef idx="minor">
+            <a:schemeClr val="lt1"/>
+          </a:fontRef>
+        </p:style>
+        <p:txBody>
+          <a:bodyPr rtlCol="0" anchor="ctr"/>
+          <a:lstStyle/>
+          <a:p/>
+        </p:txBody>
+      </p:sp>
+      <p:sp>
+        <p:nvSpPr>
+          <p:cNvPr id="15" name="TextBox 14"/>
+          <p:cNvSpPr txBox="1"/>
+          <p:nvPr/>
+        </p:nvSpPr>
+        <p:spPr>
+          <a:xfrm>
+            <a:off x="4599431" y="3392424"/>
+            <a:ext cx="3108960" cy="320040"/>
+          </a:xfrm>
+          <a:prstGeom prst="rect">
+            <a:avLst/>
+          </a:prstGeom>
+          <a:noFill/>
+        </p:spPr>
+        <p:txBody>
+          <a:bodyPr wrap="square">
+            <a:noAutofit/>
+          </a:bodyPr>
+          <a:lstStyle/>
+          <a:p>
+            <a:r>
+              <a:rPr sz="1500" b="1">
+                <a:solidFill>
+                  <a:srgbClr val="15201B"/>
+                </a:solidFill>
+                <a:latin typeface="Aptos"/>
+              </a:rPr>
+              <a:t>Trust becomes</a:t>
+            </a:r>
+          </a:p>
+        </p:txBody>
+      </p:sp>
+      <p:sp>
+        <p:nvSpPr>
+          <p:cNvPr id="16" name="TextBox 15"/>
+          <p:cNvSpPr txBox="1"/>
+          <p:nvPr/>
+        </p:nvSpPr>
+        <p:spPr>
+          <a:xfrm>
+            <a:off x="4599431" y="3776472"/>
+            <a:ext cx="3108960" cy="758952"/>
+          </a:xfrm>
+          <a:prstGeom prst="rect">
+            <a:avLst/>
+          </a:prstGeom>
+          <a:noFill/>
+        </p:spPr>
+        <p:txBody>
+          <a:bodyPr wrap="square">
+            <a:noAutofit/>
+          </a:bodyPr>
+          <a:lstStyle/>
+          <a:p>
+            <a:r>
+              <a:rPr sz="1200" b="0">
+                <a:solidFill>
+                  <a:srgbClr val="53635B"/>
+                </a:solidFill>
+                <a:latin typeface="Aptos"/>
+              </a:rPr>
+              <a:t>The receiving site and the coordinator, not only a named person.</a:t>
+            </a:r>
+          </a:p>
+        </p:txBody>
+      </p:sp>
+      <p:sp>
+        <p:nvSpPr>
+          <p:cNvPr id="17" name="Rounded Rectangle 16"/>
+          <p:cNvSpPr/>
+          <p:nvPr/>
+        </p:nvSpPr>
+        <p:spPr>
+          <a:xfrm>
+            <a:off x="8092440" y="3246120"/>
+            <a:ext cx="3017520" cy="1417320"/>
+          </a:xfrm>
+          <a:prstGeom prst="roundRect">
+            <a:avLst/>
+          </a:prstGeom>
+          <a:solidFill>
+            <a:srgbClr val="DCEBE1"/>
+          </a:solidFill>
+          <a:ln w="12700">
+            <a:solidFill>
+              <a:srgbClr val="B9C2BB"/>
+            </a:solidFill>
+          </a:ln>
+          <a:effectLst/>
+        </p:spPr>
+        <p:style>
+          <a:lnRef idx="1">
+            <a:schemeClr val="accent1"/>
+          </a:lnRef>
+          <a:fillRef idx="3">
+            <a:schemeClr val="accent1"/>
+          </a:fillRef>
+          <a:effectRef idx="2">
+            <a:schemeClr val="accent1"/>
+          </a:effectRef>
+          <a:fontRef idx="minor">
+            <a:schemeClr val="lt1"/>
+          </a:fontRef>
+        </p:style>
+        <p:txBody>
+          <a:bodyPr rtlCol="0" anchor="ctr"/>
+          <a:lstStyle/>
+          <a:p/>
+        </p:txBody>
+      </p:sp>
+      <p:sp>
+        <p:nvSpPr>
+          <p:cNvPr id="18" name="TextBox 17"/>
+          <p:cNvSpPr txBox="1"/>
+          <p:nvPr/>
+        </p:nvSpPr>
+        <p:spPr>
+          <a:xfrm>
+            <a:off x="8257031" y="3392424"/>
+            <a:ext cx="2697479" cy="320040"/>
+          </a:xfrm>
+          <a:prstGeom prst="rect">
+            <a:avLst/>
+          </a:prstGeom>
+          <a:noFill/>
+        </p:spPr>
+        <p:txBody>
+          <a:bodyPr wrap="square">
+            <a:noAutofit/>
+          </a:bodyPr>
+          <a:lstStyle/>
+          <a:p>
+            <a:r>
+              <a:rPr sz="1500" b="1">
+                <a:solidFill>
+                  <a:srgbClr val="15201B"/>
+                </a:solidFill>
+                <a:latin typeface="Aptos"/>
+              </a:rPr>
+              <a:t>Action becomes</a:t>
+            </a:r>
+          </a:p>
+        </p:txBody>
+      </p:sp>
+      <p:sp>
+        <p:nvSpPr>
+          <p:cNvPr id="19" name="TextBox 18"/>
+          <p:cNvSpPr txBox="1"/>
+          <p:nvPr/>
+        </p:nvSpPr>
+        <p:spPr>
+          <a:xfrm>
+            <a:off x="8257031" y="3776472"/>
+            <a:ext cx="2697479" cy="758952"/>
+          </a:xfrm>
+          <a:prstGeom prst="rect">
+            <a:avLst/>
+          </a:prstGeom>
+          <a:noFill/>
+        </p:spPr>
+        <p:txBody>
+          <a:bodyPr wrap="square">
+            <a:noAutofit/>
+          </a:bodyPr>
+          <a:lstStyle/>
+          <a:p>
+            <a:r>
+              <a:rPr sz="1200" b="0">
+                <a:solidFill>
+                  <a:srgbClr val="53635B"/>
+                </a:solidFill>
+                <a:latin typeface="Aptos"/>
+              </a:rPr>
+              <a:t>Limit the contribution, require enough sites, add noise, or refuse to send.</a:t>
+            </a:r>
+          </a:p>
+        </p:txBody>
+      </p:sp>
+      <p:sp>
+        <p:nvSpPr>
+          <p:cNvPr id="20" name="TextBox 19"/>
+          <p:cNvSpPr txBox="1"/>
+          <p:nvPr/>
+        </p:nvSpPr>
+        <p:spPr>
+          <a:xfrm>
+            <a:off x="914400" y="4892040"/>
+            <a:ext cx="9875520" cy="457200"/>
+          </a:xfrm>
+          <a:prstGeom prst="rect">
+            <a:avLst/>
+          </a:prstGeom>
+          <a:noFill/>
+        </p:spPr>
+        <p:txBody>
+          <a:bodyPr wrap="square">
+            <a:noAutofit/>
+          </a:bodyPr>
+          <a:lstStyle/>
+          <a:p>
+            <a:r>
+              <a:rPr sz="1200" b="1">
+                <a:solidFill>
+                  <a:srgbClr val="15201B"/>
+                </a:solidFill>
+                <a:latin typeface="Aptos"/>
+              </a:rPr>
+              <a:t>This is a real extension of the published framework, not a restatement of it.</a:t>
+            </a:r>
+          </a:p>
+        </p:txBody>
+      </p:sp>
+      <p:sp>
+        <p:nvSpPr>
+          <p:cNvPr id="21" name="TextBox 20"/>
+          <p:cNvSpPr txBox="1"/>
+          <p:nvPr/>
+        </p:nvSpPr>
+        <p:spPr>
+          <a:xfrm>
+            <a:off x="566928" y="6355080"/>
+            <a:ext cx="5669280" cy="274320"/>
+          </a:xfrm>
+          <a:prstGeom prst="rect">
+            <a:avLst/>
+          </a:prstGeom>
+          <a:noFill/>
+        </p:spPr>
+        <p:txBody>
+          <a:bodyPr wrap="square">
+            <a:noAutofit/>
+          </a:bodyPr>
+          <a:lstStyle/>
+          <a:p>
+            <a:r>
+              <a:rPr sz="800" b="0">
+                <a:solidFill>
+                  <a:srgbClr val="53635B"/>
+                </a:solidFill>
+                <a:latin typeface="Aptos"/>
+              </a:rPr>
+              <a:t>Extending the rules to model updates / 26</a:t>
+            </a:r>
+          </a:p>
+        </p:txBody>
+      </p:sp>
+    </p:spTree>
   </p:cSld>
   <p:clrMapOvr>
     <a:masterClrMapping/>
@@ -38786,7 +44616,7 @@
                 <a:ea typeface="Aptos"/>
                 <a:cs typeface="Aptos"/>
               </a:rPr>
-              <a:t>Proposed research boundary—not a clinical or regulatory conclusion / 04</a:t>
+              <a:t>Proposed research boundary—not a clinical or regulatory conclusion / 07</a:t>
             </a:r>
           </a:p>
         </p:txBody>
@@ -39105,7 +44935,7 @@
                 <a:ea typeface="Aptos"/>
                 <a:cs typeface="Aptos"/>
               </a:rPr>
-              <a:t>Federated control and data boundaries / 05</a:t>
+              <a:t>Federated control and data boundaries / 08</a:t>
             </a:r>
           </a:p>
         </p:txBody>
@@ -40119,7 +45949,7 @@
                 <a:ea typeface="Aptos"/>
                 <a:cs typeface="Aptos"/>
               </a:rPr>
-              <a:t>Versioned release lifecycle / 07</a:t>
+              <a:t>Versioned release lifecycle / 09</a:t>
             </a:r>
           </a:p>
         </p:txBody>
